--- a/a7/packages/A7 Unit 3 - Exponents and Scientific Notation/Slides/A7 3.08  Slides.pptx
+++ b/a7/packages/A7 Unit 3 - Exponents and Scientific Notation/Slides/A7 3.08  Slides.pptx
@@ -38,6 +38,7 @@
     <p:sldId id="286" r:id="rId37"/>
     <p:sldId id="287" r:id="rId38"/>
     <p:sldId id="288" r:id="rId39"/>
+    <p:sldId id="289" r:id="rId40"/>
   </p:sldIdLst>
   <p:sldSz cx="12191969" cy="6858000" type="screen4x3"/>
   <p:notesSz cx="6858000" cy="9144000"/>
@@ -7613,7 +7614,7 @@
                 </a:solidFill>
                 <a:latin typeface="Century Schoolbook"/>
               </a:rPr>
-              <a:t>Write  356,000  in scientific notation.</a:t>
+              <a:t>A stadium's renovation used  356,000  bolts.</a:t>
             </a:r>
           </a:p>
         </p:txBody>
@@ -7621,6 +7622,76 @@
       <p:sp>
         <p:nvSpPr>
           <p:cNvPr id="10" name="TextBox 9"/>
+          <p:cNvSpPr txBox="1"/>
+          <p:nvPr/>
+        </p:nvSpPr>
+        <p:spPr>
+          <a:xfrm>
+            <a:off x="777240" y="2769439"/>
+            <a:ext cx="10607040" cy="465151"/>
+          </a:xfrm>
+          <a:prstGeom prst="rect">
+            <a:avLst/>
+          </a:prstGeom>
+          <a:noFill/>
+        </p:spPr>
+        <p:txBody>
+          <a:bodyPr wrap="square" lIns="45720" rIns="45720" tIns="18288" bIns="18288" anchor="t">
+            <a:spAutoFit/>
+          </a:bodyPr>
+          <a:lstStyle/>
+          <a:p>
+            <a:pPr algn="ctr"/>
+            <a:r>
+              <a:rPr sz="2600" b="0" i="0">
+                <a:solidFill>
+                  <a:srgbClr val="1A1A1A"/>
+                </a:solidFill>
+                <a:latin typeface="Century Schoolbook"/>
+              </a:rPr>
+              <a:t>The stadium seats 71,000 people.</a:t>
+            </a:r>
+          </a:p>
+        </p:txBody>
+      </p:sp>
+      <p:sp>
+        <p:nvSpPr>
+          <p:cNvPr id="11" name="TextBox 10"/>
+          <p:cNvSpPr txBox="1"/>
+          <p:nvPr/>
+        </p:nvSpPr>
+        <p:spPr>
+          <a:xfrm>
+            <a:off x="777240" y="3344318"/>
+            <a:ext cx="10607040" cy="465151"/>
+          </a:xfrm>
+          <a:prstGeom prst="rect">
+            <a:avLst/>
+          </a:prstGeom>
+          <a:noFill/>
+        </p:spPr>
+        <p:txBody>
+          <a:bodyPr wrap="square" lIns="45720" rIns="45720" tIns="18288" bIns="18288" anchor="t">
+            <a:spAutoFit/>
+          </a:bodyPr>
+          <a:lstStyle/>
+          <a:p>
+            <a:pPr algn="ctr"/>
+            <a:r>
+              <a:rPr sz="2600" b="0" i="0">
+                <a:solidFill>
+                  <a:srgbClr val="1A1A1A"/>
+                </a:solidFill>
+                <a:latin typeface="Century Schoolbook"/>
+              </a:rPr>
+              <a:t>Write the number of bolts in scientific notation.</a:t>
+            </a:r>
+          </a:p>
+        </p:txBody>
+      </p:sp>
+      <p:sp>
+        <p:nvSpPr>
+          <p:cNvPr id="12" name="TextBox 11"/>
           <p:cNvSpPr txBox="1"/>
           <p:nvPr/>
         </p:nvSpPr>
@@ -7655,7 +7726,7 @@
       </p:sp>
       <p:sp>
         <p:nvSpPr>
-          <p:cNvPr id="11" name="TextBox 10"/>
+          <p:cNvPr id="13" name="TextBox 12"/>
           <p:cNvSpPr txBox="1"/>
           <p:nvPr/>
         </p:nvSpPr>
@@ -8456,7 +8527,7 @@
                 </a:solidFill>
                 <a:latin typeface="Century Schoolbook"/>
               </a:rPr>
-              <a:t>Write  356,000  in scientific notation.</a:t>
+              <a:t>A stadium's renovation used  356,000  bolts.</a:t>
             </a:r>
           </a:p>
         </p:txBody>
@@ -8469,7 +8540,77 @@
         </p:nvSpPr>
         <p:spPr>
           <a:xfrm>
-            <a:off x="1828800" y="2723719"/>
+            <a:off x="777240" y="2677999"/>
+            <a:ext cx="10607040" cy="465151"/>
+          </a:xfrm>
+          <a:prstGeom prst="rect">
+            <a:avLst/>
+          </a:prstGeom>
+          <a:noFill/>
+        </p:spPr>
+        <p:txBody>
+          <a:bodyPr wrap="square" lIns="45720" rIns="45720" tIns="18288" bIns="18288" anchor="t">
+            <a:spAutoFit/>
+          </a:bodyPr>
+          <a:lstStyle/>
+          <a:p>
+            <a:pPr algn="ctr"/>
+            <a:r>
+              <a:rPr sz="2600" b="0" i="0">
+                <a:solidFill>
+                  <a:srgbClr val="1A1A1A"/>
+                </a:solidFill>
+                <a:latin typeface="Century Schoolbook"/>
+              </a:rPr>
+              <a:t>The stadium seats 71,000 people.</a:t>
+            </a:r>
+          </a:p>
+        </p:txBody>
+      </p:sp>
+      <p:sp>
+        <p:nvSpPr>
+          <p:cNvPr id="11" name="TextBox 10"/>
+          <p:cNvSpPr txBox="1"/>
+          <p:nvPr/>
+        </p:nvSpPr>
+        <p:spPr>
+          <a:xfrm>
+            <a:off x="777240" y="3252878"/>
+            <a:ext cx="10607040" cy="465151"/>
+          </a:xfrm>
+          <a:prstGeom prst="rect">
+            <a:avLst/>
+          </a:prstGeom>
+          <a:noFill/>
+        </p:spPr>
+        <p:txBody>
+          <a:bodyPr wrap="square" lIns="45720" rIns="45720" tIns="18288" bIns="18288" anchor="t">
+            <a:spAutoFit/>
+          </a:bodyPr>
+          <a:lstStyle/>
+          <a:p>
+            <a:pPr algn="ctr"/>
+            <a:r>
+              <a:rPr sz="2600" b="0" i="0">
+                <a:solidFill>
+                  <a:srgbClr val="1A1A1A"/>
+                </a:solidFill>
+                <a:latin typeface="Century Schoolbook"/>
+              </a:rPr>
+              <a:t>Write the number of bolts in scientific notation.</a:t>
+            </a:r>
+          </a:p>
+        </p:txBody>
+      </p:sp>
+      <p:sp>
+        <p:nvSpPr>
+          <p:cNvPr id="12" name="TextBox 11"/>
+          <p:cNvSpPr txBox="1"/>
+          <p:nvPr/>
+        </p:nvSpPr>
+        <p:spPr>
+          <a:xfrm>
+            <a:off x="1828800" y="3873477"/>
             <a:ext cx="8503920" cy="548640"/>
           </a:xfrm>
           <a:prstGeom prst="rect">
@@ -8498,7 +8639,7 @@
       </p:sp>
       <p:sp>
         <p:nvSpPr>
-          <p:cNvPr id="11" name="TextBox 10"/>
+          <p:cNvPr id="13" name="TextBox 12"/>
           <p:cNvSpPr txBox="1"/>
           <p:nvPr/>
         </p:nvSpPr>
@@ -15302,7 +15443,7 @@
                 </a:solidFill>
                 <a:latin typeface="Century Schoolbook"/>
               </a:rPr>
-              <a:t>IXL</a:t>
+              <a:t>Independent Set</a:t>
             </a:r>
           </a:p>
         </p:txBody>
@@ -15407,7 +15548,7 @@
                 </a:solidFill>
                 <a:latin typeface="Century Schoolbook"/>
               </a:rPr>
-              <a:t>Last five minutes.</a:t>
+              <a:t>Six questions. On your own, in silence.</a:t>
             </a:r>
           </a:p>
         </p:txBody>
@@ -15525,6 +15666,479 @@
         </p:nvSpPr>
         <p:spPr>
           <a:xfrm>
+            <a:off x="960120" y="2011680"/>
+            <a:ext cx="548640" cy="356616"/>
+          </a:xfrm>
+          <a:prstGeom prst="rect">
+            <a:avLst/>
+          </a:prstGeom>
+          <a:noFill/>
+        </p:spPr>
+        <p:txBody>
+          <a:bodyPr wrap="square" lIns="45720" rIns="45720" tIns="18288" bIns="18288" anchor="t">
+            <a:spAutoFit/>
+          </a:bodyPr>
+          <a:lstStyle/>
+          <a:p>
+            <a:pPr algn="l"/>
+            <a:r>
+              <a:rPr sz="2100" b="1" i="0">
+                <a:solidFill>
+                  <a:srgbClr val="0B5394"/>
+                </a:solidFill>
+                <a:latin typeface="Century Schoolbook"/>
+              </a:rPr>
+              <a:t>1.</a:t>
+            </a:r>
+          </a:p>
+        </p:txBody>
+      </p:sp>
+      <p:sp>
+        <p:nvSpPr>
+          <p:cNvPr id="10" name="TextBox 9"/>
+          <p:cNvSpPr txBox="1"/>
+          <p:nvPr/>
+        </p:nvSpPr>
+        <p:spPr>
+          <a:xfrm>
+            <a:off x="1554480" y="2011680"/>
+            <a:ext cx="9829800" cy="411480"/>
+          </a:xfrm>
+          <a:prstGeom prst="rect">
+            <a:avLst/>
+          </a:prstGeom>
+          <a:noFill/>
+        </p:spPr>
+        <p:txBody>
+          <a:bodyPr wrap="square" lIns="45720" rIns="45720" tIns="18288" bIns="18288" anchor="t">
+            <a:spAutoFit/>
+          </a:bodyPr>
+          <a:lstStyle/>
+          <a:p>
+            <a:pPr algn="l"/>
+            <a:r>
+              <a:rPr sz="2100" b="0" i="0">
+                <a:solidFill>
+                  <a:srgbClr val="1A1A1A"/>
+                </a:solidFill>
+                <a:latin typeface="Century Schoolbook"/>
+              </a:rPr>
+              <a:t>Six questions. Work down the page.</a:t>
+            </a:r>
+          </a:p>
+        </p:txBody>
+      </p:sp>
+      <p:sp>
+        <p:nvSpPr>
+          <p:cNvPr id="11" name="TextBox 10"/>
+          <p:cNvSpPr txBox="1"/>
+          <p:nvPr/>
+        </p:nvSpPr>
+        <p:spPr>
+          <a:xfrm>
+            <a:off x="960120" y="2551176"/>
+            <a:ext cx="548640" cy="356616"/>
+          </a:xfrm>
+          <a:prstGeom prst="rect">
+            <a:avLst/>
+          </a:prstGeom>
+          <a:noFill/>
+        </p:spPr>
+        <p:txBody>
+          <a:bodyPr wrap="square" lIns="45720" rIns="45720" tIns="18288" bIns="18288" anchor="t">
+            <a:spAutoFit/>
+          </a:bodyPr>
+          <a:lstStyle/>
+          <a:p>
+            <a:pPr algn="l"/>
+            <a:r>
+              <a:rPr sz="2100" b="1" i="0">
+                <a:solidFill>
+                  <a:srgbClr val="0B5394"/>
+                </a:solidFill>
+                <a:latin typeface="Century Schoolbook"/>
+              </a:rPr>
+              <a:t>2.</a:t>
+            </a:r>
+          </a:p>
+        </p:txBody>
+      </p:sp>
+      <p:sp>
+        <p:nvSpPr>
+          <p:cNvPr id="12" name="TextBox 11"/>
+          <p:cNvSpPr txBox="1"/>
+          <p:nvPr/>
+        </p:nvSpPr>
+        <p:spPr>
+          <a:xfrm>
+            <a:off x="1554480" y="2551176"/>
+            <a:ext cx="9829800" cy="411480"/>
+          </a:xfrm>
+          <a:prstGeom prst="rect">
+            <a:avLst/>
+          </a:prstGeom>
+          <a:noFill/>
+        </p:spPr>
+        <p:txBody>
+          <a:bodyPr wrap="square" lIns="45720" rIns="45720" tIns="18288" bIns="18288" anchor="t">
+            <a:spAutoFit/>
+          </a:bodyPr>
+          <a:lstStyle/>
+          <a:p>
+            <a:pPr algn="l"/>
+            <a:r>
+              <a:rPr sz="2100" b="0" i="0">
+                <a:solidFill>
+                  <a:srgbClr val="1A1A1A"/>
+                </a:solidFill>
+                <a:latin typeface="Century Schoolbook"/>
+              </a:rPr>
+              <a:t>Show the step that does the work, not just the answer.</a:t>
+            </a:r>
+          </a:p>
+        </p:txBody>
+      </p:sp>
+      <p:sp>
+        <p:nvSpPr>
+          <p:cNvPr id="13" name="TextBox 12"/>
+          <p:cNvSpPr txBox="1"/>
+          <p:nvPr/>
+        </p:nvSpPr>
+        <p:spPr>
+          <a:xfrm>
+            <a:off x="960120" y="3090672"/>
+            <a:ext cx="548640" cy="356616"/>
+          </a:xfrm>
+          <a:prstGeom prst="rect">
+            <a:avLst/>
+          </a:prstGeom>
+          <a:noFill/>
+        </p:spPr>
+        <p:txBody>
+          <a:bodyPr wrap="square" lIns="45720" rIns="45720" tIns="18288" bIns="18288" anchor="t">
+            <a:spAutoFit/>
+          </a:bodyPr>
+          <a:lstStyle/>
+          <a:p>
+            <a:pPr algn="l"/>
+            <a:r>
+              <a:rPr sz="2100" b="1" i="0">
+                <a:solidFill>
+                  <a:srgbClr val="0B5394"/>
+                </a:solidFill>
+                <a:latin typeface="Century Schoolbook"/>
+              </a:rPr>
+              <a:t>3.</a:t>
+            </a:r>
+          </a:p>
+        </p:txBody>
+      </p:sp>
+      <p:sp>
+        <p:nvSpPr>
+          <p:cNvPr id="14" name="TextBox 13"/>
+          <p:cNvSpPr txBox="1"/>
+          <p:nvPr/>
+        </p:nvSpPr>
+        <p:spPr>
+          <a:xfrm>
+            <a:off x="1554480" y="3090672"/>
+            <a:ext cx="9829800" cy="411480"/>
+          </a:xfrm>
+          <a:prstGeom prst="rect">
+            <a:avLst/>
+          </a:prstGeom>
+          <a:noFill/>
+        </p:spPr>
+        <p:txBody>
+          <a:bodyPr wrap="square" lIns="45720" rIns="45720" tIns="18288" bIns="18288" anchor="t">
+            <a:spAutoFit/>
+          </a:bodyPr>
+          <a:lstStyle/>
+          <a:p>
+            <a:pPr algn="l"/>
+            <a:r>
+              <a:rPr sz="2100" b="0" i="0">
+                <a:solidFill>
+                  <a:srgbClr val="1A1A1A"/>
+                </a:solidFill>
+                <a:latin typeface="Century Schoolbook"/>
+              </a:rPr>
+              <a:t>Silence until the six minutes are up.</a:t>
+            </a:r>
+          </a:p>
+        </p:txBody>
+      </p:sp>
+    </p:spTree>
+  </p:cSld>
+  <p:clrMapOvr>
+    <a:masterClrMapping/>
+  </p:clrMapOvr>
+</p:sld>
+</file>
+
+<file path=ppt/slides/slide34.xml><?xml version="1.0" encoding="utf-8"?>
+<p:sld xmlns:a="http://schemas.openxmlformats.org/drawingml/2006/main" xmlns:p="http://schemas.openxmlformats.org/presentationml/2006/main" xmlns:r="http://schemas.openxmlformats.org/officeDocument/2006/relationships">
+  <p:cSld>
+    <p:spTree>
+      <p:nvGrpSpPr>
+        <p:cNvPr id="1" name=""/>
+        <p:cNvGrpSpPr/>
+        <p:nvPr/>
+      </p:nvGrpSpPr>
+      <p:grpSpPr/>
+      <p:sp>
+        <p:nvSpPr>
+          <p:cNvPr id="2" name="TextBox 1"/>
+          <p:cNvSpPr txBox="1"/>
+          <p:nvPr/>
+        </p:nvSpPr>
+        <p:spPr>
+          <a:xfrm>
+            <a:off x="777240" y="365760"/>
+            <a:ext cx="10607040" cy="640080"/>
+          </a:xfrm>
+          <a:prstGeom prst="rect">
+            <a:avLst/>
+          </a:prstGeom>
+          <a:noFill/>
+        </p:spPr>
+        <p:txBody>
+          <a:bodyPr wrap="square" lIns="45720" rIns="45720" tIns="18288" bIns="18288" anchor="t">
+            <a:spAutoFit/>
+          </a:bodyPr>
+          <a:lstStyle/>
+          <a:p>
+            <a:pPr algn="l"/>
+            <a:r>
+              <a:rPr sz="3600" b="1" i="0">
+                <a:solidFill>
+                  <a:srgbClr val="1A1A1A"/>
+                </a:solidFill>
+                <a:latin typeface="Century Schoolbook"/>
+              </a:rPr>
+              <a:t>IXL</a:t>
+            </a:r>
+          </a:p>
+        </p:txBody>
+      </p:sp>
+      <p:cxnSp>
+        <p:nvCxnSpPr>
+          <p:cNvPr id="3" name="Connector 2"/>
+          <p:cNvCxnSpPr/>
+          <p:nvPr/>
+        </p:nvCxnSpPr>
+        <p:spPr>
+          <a:xfrm>
+            <a:off x="777240" y="1097280"/>
+            <a:ext cx="10607040" cy="0"/>
+          </a:xfrm>
+          <a:prstGeom prst="line">
+            <a:avLst/>
+          </a:prstGeom>
+          <a:ln w="19050">
+            <a:solidFill>
+              <a:srgbClr val="1A1A1A"/>
+            </a:solidFill>
+          </a:ln>
+        </p:spPr>
+        <p:style>
+          <a:lnRef idx="2">
+            <a:schemeClr val="accent1"/>
+          </a:lnRef>
+          <a:fillRef idx="0">
+            <a:schemeClr val="accent1"/>
+          </a:fillRef>
+          <a:effectRef idx="1">
+            <a:schemeClr val="accent1"/>
+          </a:effectRef>
+          <a:fontRef idx="minor">
+            <a:schemeClr val="tx1"/>
+          </a:fontRef>
+        </p:style>
+      </p:cxnSp>
+      <p:cxnSp>
+        <p:nvCxnSpPr>
+          <p:cNvPr id="4" name="Connector 3"/>
+          <p:cNvCxnSpPr/>
+          <p:nvPr/>
+        </p:nvCxnSpPr>
+        <p:spPr>
+          <a:xfrm>
+            <a:off x="777240" y="1179576"/>
+            <a:ext cx="10607040" cy="0"/>
+          </a:xfrm>
+          <a:prstGeom prst="line">
+            <a:avLst/>
+          </a:prstGeom>
+          <a:ln w="9525">
+            <a:solidFill>
+              <a:srgbClr val="1A1A1A"/>
+            </a:solidFill>
+          </a:ln>
+        </p:spPr>
+        <p:style>
+          <a:lnRef idx="2">
+            <a:schemeClr val="accent1"/>
+          </a:lnRef>
+          <a:fillRef idx="0">
+            <a:schemeClr val="accent1"/>
+          </a:fillRef>
+          <a:effectRef idx="1">
+            <a:schemeClr val="accent1"/>
+          </a:effectRef>
+          <a:fontRef idx="minor">
+            <a:schemeClr val="tx1"/>
+          </a:fontRef>
+        </p:style>
+      </p:cxnSp>
+      <p:sp>
+        <p:nvSpPr>
+          <p:cNvPr id="5" name="TextBox 4"/>
+          <p:cNvSpPr txBox="1"/>
+          <p:nvPr/>
+        </p:nvSpPr>
+        <p:spPr>
+          <a:xfrm>
+            <a:off x="777240" y="1261872"/>
+            <a:ext cx="10607040" cy="310896"/>
+          </a:xfrm>
+          <a:prstGeom prst="rect">
+            <a:avLst/>
+          </a:prstGeom>
+          <a:noFill/>
+        </p:spPr>
+        <p:txBody>
+          <a:bodyPr wrap="square" lIns="45720" rIns="45720" tIns="18288" bIns="18288" anchor="t">
+            <a:spAutoFit/>
+          </a:bodyPr>
+          <a:lstStyle/>
+          <a:p>
+            <a:pPr algn="l"/>
+            <a:r>
+              <a:rPr sz="1700" b="0" i="1">
+                <a:solidFill>
+                  <a:srgbClr val="6B6B6B"/>
+                </a:solidFill>
+                <a:latin typeface="Century Schoolbook"/>
+              </a:rPr>
+              <a:t>Last five minutes.</a:t>
+            </a:r>
+          </a:p>
+        </p:txBody>
+      </p:sp>
+      <p:cxnSp>
+        <p:nvCxnSpPr>
+          <p:cNvPr id="6" name="Connector 5"/>
+          <p:cNvCxnSpPr/>
+          <p:nvPr/>
+        </p:nvCxnSpPr>
+        <p:spPr>
+          <a:xfrm>
+            <a:off x="777240" y="6199632"/>
+            <a:ext cx="10607040" cy="0"/>
+          </a:xfrm>
+          <a:prstGeom prst="line">
+            <a:avLst/>
+          </a:prstGeom>
+          <a:ln w="9525">
+            <a:solidFill>
+              <a:srgbClr val="6B6B6B"/>
+            </a:solidFill>
+          </a:ln>
+        </p:spPr>
+        <p:style>
+          <a:lnRef idx="2">
+            <a:schemeClr val="accent1"/>
+          </a:lnRef>
+          <a:fillRef idx="0">
+            <a:schemeClr val="accent1"/>
+          </a:fillRef>
+          <a:effectRef idx="1">
+            <a:schemeClr val="accent1"/>
+          </a:effectRef>
+          <a:fontRef idx="minor">
+            <a:schemeClr val="tx1"/>
+          </a:fontRef>
+        </p:style>
+      </p:cxnSp>
+      <p:sp>
+        <p:nvSpPr>
+          <p:cNvPr id="7" name="TextBox 6"/>
+          <p:cNvSpPr txBox="1"/>
+          <p:nvPr/>
+        </p:nvSpPr>
+        <p:spPr>
+          <a:xfrm>
+            <a:off x="777240" y="6272784"/>
+            <a:ext cx="9692640" cy="274320"/>
+          </a:xfrm>
+          <a:prstGeom prst="rect">
+            <a:avLst/>
+          </a:prstGeom>
+          <a:noFill/>
+        </p:spPr>
+        <p:txBody>
+          <a:bodyPr wrap="square" lIns="45720" rIns="45720" tIns="18288" bIns="18288" anchor="t">
+            <a:spAutoFit/>
+          </a:bodyPr>
+          <a:lstStyle/>
+          <a:p>
+            <a:pPr algn="l"/>
+            <a:r>
+              <a:rPr sz="1100" b="0" i="1">
+                <a:solidFill>
+                  <a:srgbClr val="6B6B6B"/>
+                </a:solidFill>
+                <a:latin typeface="Century Schoolbook"/>
+              </a:rPr>
+              <a:t>Grade 7 Accelerated · Unit 3 · Lesson 8 — Writing Large Numbers in Scientific Notation</a:t>
+            </a:r>
+          </a:p>
+        </p:txBody>
+      </p:sp>
+      <p:sp>
+        <p:nvSpPr>
+          <p:cNvPr id="8" name="TextBox 7"/>
+          <p:cNvSpPr txBox="1"/>
+          <p:nvPr/>
+        </p:nvSpPr>
+        <p:spPr>
+          <a:xfrm>
+            <a:off x="10744200" y="6272784"/>
+            <a:ext cx="640080" cy="274320"/>
+          </a:xfrm>
+          <a:prstGeom prst="rect">
+            <a:avLst/>
+          </a:prstGeom>
+          <a:noFill/>
+        </p:spPr>
+        <p:txBody>
+          <a:bodyPr wrap="square" lIns="45720" rIns="45720" tIns="18288" bIns="18288" anchor="t">
+            <a:spAutoFit/>
+          </a:bodyPr>
+          <a:lstStyle/>
+          <a:p>
+            <a:pPr algn="r"/>
+            <a:r>
+              <a:rPr sz="1100" b="0" i="0">
+                <a:solidFill>
+                  <a:srgbClr val="6B6B6B"/>
+                </a:solidFill>
+                <a:latin typeface="Century Schoolbook"/>
+              </a:rPr>
+              <a:t>34</a:t>
+            </a:r>
+          </a:p>
+        </p:txBody>
+      </p:sp>
+      <p:sp>
+        <p:nvSpPr>
+          <p:cNvPr id="9" name="TextBox 8"/>
+          <p:cNvSpPr txBox="1"/>
+          <p:nvPr/>
+        </p:nvSpPr>
+        <p:spPr>
+          <a:xfrm>
             <a:off x="960120" y="1828800"/>
             <a:ext cx="548640" cy="356616"/>
           </a:xfrm>
@@ -15722,7 +16336,7 @@
                 </a:solidFill>
                 <a:latin typeface="Century Schoolbook"/>
               </a:rPr>
-              <a:t>Stop at a SmartScore of 67 on each skill. Whatever you do not finish is tonight's practice.</a:t>
+              <a:t>Every skill listed is required, to a SmartScore of 67. Due at the start of the next class.</a:t>
             </a:r>
           </a:p>
         </p:txBody>
@@ -15757,7 +16371,7 @@
                 </a:solidFill>
                 <a:latin typeface="Century Schoolbook"/>
               </a:rPr>
-              <a:t>Today's skills</a:t>
+              <a:t>Today's skills — all required</a:t>
             </a:r>
           </a:p>
         </p:txBody>

--- a/a7/packages/A7 Unit 3 - Exponents and Scientific Notation/Slides/A7 3.08  Slides.pptx
+++ b/a7/packages/A7 Unit 3 - Exponents and Scientific Notation/Slides/A7 3.08  Slides.pptx
@@ -16476,7 +16476,7 @@
                 </a:solidFill>
                 <a:latin typeface="Century Schoolbook"/>
               </a:rPr>
-              <a:t>Also consider: Powers of ten — LJQ</a:t>
+              <a:t>Powers of ten — LJQ</a:t>
             </a:r>
           </a:p>
         </p:txBody>

--- a/a7/packages/A7 Unit 3 - Exponents and Scientific Notation/Slides/A7 3.08  Slides.pptx
+++ b/a7/packages/A7 Unit 3 - Exponents and Scientific Notation/Slides/A7 3.08  Slides.pptx
@@ -4200,8 +4200,8 @@
         </p:nvSpPr>
         <p:spPr>
           <a:xfrm>
-            <a:off x="1470659" y="2080260"/>
-            <a:ext cx="4674616" cy="457200"/>
+            <a:off x="1688167" y="2080260"/>
+            <a:ext cx="4558064" cy="457200"/>
           </a:xfrm>
           <a:prstGeom prst="rect">
             <a:avLst/>
@@ -4210,7 +4210,7 @@
         </p:spPr>
         <p:txBody>
           <a:bodyPr wrap="none" lIns="45720" rIns="45720" tIns="18288" bIns="18288" anchor="ctr">
-            <a:spAutoFit/>
+            <a:noAutofit/>
           </a:bodyPr>
           <a:lstStyle/>
           <a:p>
@@ -4243,7 +4243,7 @@
         </p:blipFill>
         <p:spPr>
           <a:xfrm>
-            <a:off x="6008116" y="2133599"/>
+            <a:off x="6109072" y="2133599"/>
             <a:ext cx="1405128" cy="350520"/>
           </a:xfrm>
           <a:prstGeom prst="rect">
@@ -4259,8 +4259,8 @@
         </p:nvSpPr>
         <p:spPr>
           <a:xfrm>
-            <a:off x="7413244" y="2080260"/>
-            <a:ext cx="1583944" cy="457200"/>
+            <a:off x="7514200" y="2080260"/>
+            <a:ext cx="1356212" cy="457200"/>
           </a:xfrm>
           <a:prstGeom prst="rect">
             <a:avLst/>
@@ -4269,7 +4269,7 @@
         </p:spPr>
         <p:txBody>
           <a:bodyPr wrap="none" lIns="45720" rIns="45720" tIns="18288" bIns="18288" anchor="ctr">
-            <a:spAutoFit/>
+            <a:noAutofit/>
           </a:bodyPr>
           <a:lstStyle/>
           <a:p>
@@ -4302,7 +4302,7 @@
         </p:blipFill>
         <p:spPr>
           <a:xfrm>
-            <a:off x="8860028" y="2136648"/>
+            <a:off x="8733252" y="2136648"/>
             <a:ext cx="1414272" cy="344424"/>
           </a:xfrm>
           <a:prstGeom prst="rect">
@@ -4318,8 +4318,8 @@
         </p:nvSpPr>
         <p:spPr>
           <a:xfrm>
-            <a:off x="10274300" y="2080260"/>
-            <a:ext cx="553720" cy="457200"/>
+            <a:off x="10147524" y="2080260"/>
+            <a:ext cx="462987" cy="457200"/>
           </a:xfrm>
           <a:prstGeom prst="rect">
             <a:avLst/>
@@ -4328,7 +4328,7 @@
         </p:spPr>
         <p:txBody>
           <a:bodyPr wrap="none" lIns="45720" rIns="45720" tIns="18288" bIns="18288" anchor="ctr">
-            <a:spAutoFit/>
+            <a:noAutofit/>
           </a:bodyPr>
           <a:lstStyle/>
           <a:p>
@@ -4610,7 +4610,7 @@
       </p:sp>
       <p:pic>
         <p:nvPicPr>
-          <p:cNvPr id="9" name="Picture 8" descr="81ace4f2647ac855.png"/>
+          <p:cNvPr id="9" name="Picture 8" descr="862d7a83bd8e2fe0.png"/>
           <p:cNvPicPr>
             <a:picLocks noChangeAspect="1"/>
           </p:cNvPicPr>
@@ -4625,7 +4625,7 @@
         <p:spPr>
           <a:xfrm>
             <a:off x="1828800" y="1920240"/>
-            <a:ext cx="1286256" cy="524256"/>
+            <a:ext cx="1438656" cy="688848"/>
           </a:xfrm>
           <a:prstGeom prst="rect">
             <a:avLst/>
@@ -4640,7 +4640,7 @@
         </p:nvSpPr>
         <p:spPr>
           <a:xfrm>
-            <a:off x="3572256" y="1953768"/>
+            <a:off x="3724656" y="2036064"/>
             <a:ext cx="6400800" cy="502920"/>
           </a:xfrm>
           <a:prstGeom prst="rect">
@@ -4669,7 +4669,7 @@
       </p:sp>
       <p:pic>
         <p:nvPicPr>
-          <p:cNvPr id="11" name="Picture 10" descr="f148e08292888e1a.png"/>
+          <p:cNvPr id="11" name="Picture 10" descr="b1fb3cad81ed9316.png"/>
           <p:cNvPicPr>
             <a:picLocks noChangeAspect="1"/>
           </p:cNvPicPr>
@@ -4683,8 +4683,8 @@
         </p:blipFill>
         <p:spPr>
           <a:xfrm>
-            <a:off x="1828800" y="2718816"/>
-            <a:ext cx="2212848" cy="603504"/>
+            <a:off x="1828800" y="2883408"/>
+            <a:ext cx="2386584" cy="810768"/>
           </a:xfrm>
           <a:prstGeom prst="rect">
             <a:avLst/>
@@ -4699,7 +4699,7 @@
         </p:nvSpPr>
         <p:spPr>
           <a:xfrm>
-            <a:off x="4498848" y="2791968"/>
+            <a:off x="4672583" y="3060192"/>
             <a:ext cx="6400800" cy="502920"/>
           </a:xfrm>
           <a:prstGeom prst="rect">
@@ -4742,7 +4742,7 @@
         </p:blipFill>
         <p:spPr>
           <a:xfrm>
-            <a:off x="1828800" y="3596640"/>
+            <a:off x="1828800" y="3968496"/>
             <a:ext cx="2026920" cy="289560"/>
           </a:xfrm>
           <a:prstGeom prst="rect">
@@ -4758,7 +4758,7 @@
         </p:nvSpPr>
         <p:spPr>
           <a:xfrm>
-            <a:off x="4312920" y="3512819"/>
+            <a:off x="4312920" y="3884675"/>
             <a:ext cx="6400800" cy="502920"/>
           </a:xfrm>
           <a:prstGeom prst="rect">
@@ -4793,7 +4793,7 @@
         </p:nvSpPr>
         <p:spPr>
           <a:xfrm>
-            <a:off x="777240" y="4572000"/>
+            <a:off x="777240" y="4715256"/>
             <a:ext cx="10607040" cy="548640"/>
           </a:xfrm>
           <a:prstGeom prst="rect">
@@ -5091,8 +5091,8 @@
         </p:nvSpPr>
         <p:spPr>
           <a:xfrm>
-            <a:off x="3101340" y="2185415"/>
-            <a:ext cx="4331208" cy="457200"/>
+            <a:off x="3304952" y="2185415"/>
+            <a:ext cx="3923983" cy="457200"/>
           </a:xfrm>
           <a:prstGeom prst="rect">
             <a:avLst/>
@@ -5101,7 +5101,7 @@
         </p:spPr>
         <p:txBody>
           <a:bodyPr wrap="none" lIns="45720" rIns="45720" tIns="18288" bIns="18288" anchor="ctr">
-            <a:spAutoFit/>
+            <a:noAutofit/>
           </a:bodyPr>
           <a:lstStyle/>
           <a:p>
@@ -5134,7 +5134,7 @@
         </p:blipFill>
         <p:spPr>
           <a:xfrm>
-            <a:off x="7295388" y="2194560"/>
+            <a:off x="7091775" y="2194560"/>
             <a:ext cx="1764792" cy="438912"/>
           </a:xfrm>
           <a:prstGeom prst="rect">
@@ -5150,8 +5150,8 @@
         </p:nvSpPr>
         <p:spPr>
           <a:xfrm>
-            <a:off x="3374136" y="2945892"/>
-            <a:ext cx="3816096" cy="457200"/>
+            <a:off x="3624165" y="2945892"/>
+            <a:ext cx="3316037" cy="457200"/>
           </a:xfrm>
           <a:prstGeom prst="rect">
             <a:avLst/>
@@ -5160,7 +5160,7 @@
         </p:spPr>
         <p:txBody>
           <a:bodyPr wrap="none" lIns="45720" rIns="45720" tIns="18288" bIns="18288" anchor="ctr">
-            <a:spAutoFit/>
+            <a:noAutofit/>
           </a:bodyPr>
           <a:lstStyle/>
           <a:p>
@@ -5193,7 +5193,7 @@
         </p:blipFill>
         <p:spPr>
           <a:xfrm>
-            <a:off x="7053072" y="2953512"/>
+            <a:off x="6803042" y="2953512"/>
             <a:ext cx="1734312" cy="441960"/>
           </a:xfrm>
           <a:prstGeom prst="rect">
@@ -5507,8 +5507,8 @@
         </p:nvSpPr>
         <p:spPr>
           <a:xfrm>
-            <a:off x="3101340" y="2185415"/>
-            <a:ext cx="4331208" cy="457200"/>
+            <a:off x="3304952" y="2185415"/>
+            <a:ext cx="3923983" cy="457200"/>
           </a:xfrm>
           <a:prstGeom prst="rect">
             <a:avLst/>
@@ -5517,7 +5517,7 @@
         </p:spPr>
         <p:txBody>
           <a:bodyPr wrap="none" lIns="45720" rIns="45720" tIns="18288" bIns="18288" anchor="ctr">
-            <a:spAutoFit/>
+            <a:noAutofit/>
           </a:bodyPr>
           <a:lstStyle/>
           <a:p>
@@ -5550,7 +5550,7 @@
         </p:blipFill>
         <p:spPr>
           <a:xfrm>
-            <a:off x="7295388" y="2194560"/>
+            <a:off x="7091775" y="2194560"/>
             <a:ext cx="1764792" cy="438912"/>
           </a:xfrm>
           <a:prstGeom prst="rect">
@@ -5566,8 +5566,8 @@
         </p:nvSpPr>
         <p:spPr>
           <a:xfrm>
-            <a:off x="3374136" y="2945892"/>
-            <a:ext cx="3816096" cy="457200"/>
+            <a:off x="3624165" y="2945892"/>
+            <a:ext cx="3316037" cy="457200"/>
           </a:xfrm>
           <a:prstGeom prst="rect">
             <a:avLst/>
@@ -5576,7 +5576,7 @@
         </p:spPr>
         <p:txBody>
           <a:bodyPr wrap="none" lIns="45720" rIns="45720" tIns="18288" bIns="18288" anchor="ctr">
-            <a:spAutoFit/>
+            <a:noAutofit/>
           </a:bodyPr>
           <a:lstStyle/>
           <a:p>
@@ -5609,7 +5609,7 @@
         </p:blipFill>
         <p:spPr>
           <a:xfrm>
-            <a:off x="7053072" y="2953512"/>
+            <a:off x="6803042" y="2953512"/>
             <a:ext cx="1734312" cy="441960"/>
           </a:xfrm>
           <a:prstGeom prst="rect">
@@ -6738,8 +6738,8 @@
         </p:nvSpPr>
         <p:spPr>
           <a:xfrm>
-            <a:off x="3060699" y="2171700"/>
-            <a:ext cx="1412240" cy="457200"/>
+            <a:off x="3230641" y="2171700"/>
+            <a:ext cx="1311040" cy="457200"/>
           </a:xfrm>
           <a:prstGeom prst="rect">
             <a:avLst/>
@@ -6748,7 +6748,7 @@
         </p:spPr>
         <p:txBody>
           <a:bodyPr wrap="none" lIns="45720" rIns="45720" tIns="18288" bIns="18288" anchor="ctr">
-            <a:spAutoFit/>
+            <a:noAutofit/>
           </a:bodyPr>
           <a:lstStyle/>
           <a:p>
@@ -6781,7 +6781,7 @@
         </p:blipFill>
         <p:spPr>
           <a:xfrm>
-            <a:off x="4335780" y="2225040"/>
+            <a:off x="4404522" y="2225040"/>
             <a:ext cx="1429512" cy="350520"/>
           </a:xfrm>
           <a:prstGeom prst="rect">
@@ -6797,8 +6797,8 @@
         </p:nvSpPr>
         <p:spPr>
           <a:xfrm>
-            <a:off x="5765292" y="2171700"/>
-            <a:ext cx="3472688" cy="457200"/>
+            <a:off x="5834034" y="2171700"/>
+            <a:ext cx="3234003" cy="457200"/>
           </a:xfrm>
           <a:prstGeom prst="rect">
             <a:avLst/>
@@ -6807,7 +6807,7 @@
         </p:spPr>
         <p:txBody>
           <a:bodyPr wrap="none" lIns="45720" rIns="45720" tIns="18288" bIns="18288" anchor="ctr">
-            <a:spAutoFit/>
+            <a:noAutofit/>
           </a:bodyPr>
           <a:lstStyle/>
           <a:p>
@@ -7165,8 +7165,8 @@
         </p:nvSpPr>
         <p:spPr>
           <a:xfrm>
-            <a:off x="3060699" y="2080260"/>
-            <a:ext cx="1412240" cy="457200"/>
+            <a:off x="3230641" y="2080260"/>
+            <a:ext cx="1311040" cy="457200"/>
           </a:xfrm>
           <a:prstGeom prst="rect">
             <a:avLst/>
@@ -7175,7 +7175,7 @@
         </p:spPr>
         <p:txBody>
           <a:bodyPr wrap="none" lIns="45720" rIns="45720" tIns="18288" bIns="18288" anchor="ctr">
-            <a:spAutoFit/>
+            <a:noAutofit/>
           </a:bodyPr>
           <a:lstStyle/>
           <a:p>
@@ -7208,7 +7208,7 @@
         </p:blipFill>
         <p:spPr>
           <a:xfrm>
-            <a:off x="4335780" y="2133599"/>
+            <a:off x="4404522" y="2133599"/>
             <a:ext cx="1429512" cy="350520"/>
           </a:xfrm>
           <a:prstGeom prst="rect">
@@ -7224,8 +7224,8 @@
         </p:nvSpPr>
         <p:spPr>
           <a:xfrm>
-            <a:off x="5765292" y="2080260"/>
-            <a:ext cx="3472688" cy="457200"/>
+            <a:off x="5834034" y="2080260"/>
+            <a:ext cx="3234003" cy="457200"/>
           </a:xfrm>
           <a:prstGeom prst="rect">
             <a:avLst/>
@@ -7234,7 +7234,7 @@
         </p:spPr>
         <p:txBody>
           <a:bodyPr wrap="none" lIns="45720" rIns="45720" tIns="18288" bIns="18288" anchor="ctr">
-            <a:spAutoFit/>
+            <a:noAutofit/>
           </a:bodyPr>
           <a:lstStyle/>
           <a:p>
@@ -8031,7 +8031,7 @@
         <p:spPr>
           <a:xfrm>
             <a:off x="1874519" y="1760220"/>
-            <a:ext cx="6285992" cy="457200"/>
+            <a:ext cx="5670993" cy="457200"/>
           </a:xfrm>
           <a:prstGeom prst="rect">
             <a:avLst/>
@@ -8040,7 +8040,7 @@
         </p:spPr>
         <p:txBody>
           <a:bodyPr wrap="none" lIns="45720" rIns="45720" tIns="18288" bIns="18288" anchor="ctr">
-            <a:spAutoFit/>
+            <a:noAutofit/>
           </a:bodyPr>
           <a:lstStyle/>
           <a:p>
@@ -8073,7 +8073,7 @@
         </p:blipFill>
         <p:spPr>
           <a:xfrm>
-            <a:off x="8023352" y="1850136"/>
+            <a:off x="7408353" y="1850136"/>
             <a:ext cx="585216" cy="277368"/>
           </a:xfrm>
           <a:prstGeom prst="rect">
@@ -8090,7 +8090,7 @@
         <p:spPr>
           <a:xfrm>
             <a:off x="1874519" y="2372868"/>
-            <a:ext cx="3551936" cy="457200"/>
+            <a:ext cx="3064939" cy="457200"/>
           </a:xfrm>
           <a:prstGeom prst="rect">
             <a:avLst/>
@@ -8099,7 +8099,7 @@
         </p:spPr>
         <p:txBody>
           <a:bodyPr wrap="none" lIns="45720" rIns="45720" tIns="18288" bIns="18288" anchor="ctr">
-            <a:spAutoFit/>
+            <a:noAutofit/>
           </a:bodyPr>
           <a:lstStyle/>
           <a:p>
@@ -8132,7 +8132,7 @@
         </p:blipFill>
         <p:spPr>
           <a:xfrm>
-            <a:off x="5289296" y="2433828"/>
+            <a:off x="4802299" y="2433828"/>
             <a:ext cx="774192" cy="335280"/>
           </a:xfrm>
           <a:prstGeom prst="rect">
@@ -8149,7 +8149,7 @@
         <p:spPr>
           <a:xfrm>
             <a:off x="1874519" y="2985516"/>
-            <a:ext cx="3551936" cy="457200"/>
+            <a:ext cx="3064939" cy="457200"/>
           </a:xfrm>
           <a:prstGeom prst="rect">
             <a:avLst/>
@@ -8158,7 +8158,7 @@
         </p:spPr>
         <p:txBody>
           <a:bodyPr wrap="none" lIns="45720" rIns="45720" tIns="18288" bIns="18288" anchor="ctr">
-            <a:spAutoFit/>
+            <a:noAutofit/>
           </a:bodyPr>
           <a:lstStyle/>
           <a:p>
@@ -8191,7 +8191,7 @@
         </p:blipFill>
         <p:spPr>
           <a:xfrm>
-            <a:off x="5289296" y="3009900"/>
+            <a:off x="4802299" y="3009900"/>
             <a:ext cx="853440" cy="408432"/>
           </a:xfrm>
           <a:prstGeom prst="rect">
@@ -8208,7 +8208,7 @@
         <p:spPr>
           <a:xfrm>
             <a:off x="1874519" y="3598164"/>
-            <a:ext cx="6741668" cy="457200"/>
+            <a:ext cx="5997604" cy="457200"/>
           </a:xfrm>
           <a:prstGeom prst="rect">
             <a:avLst/>
@@ -8217,7 +8217,7 @@
         </p:spPr>
         <p:txBody>
           <a:bodyPr wrap="none" lIns="45720" rIns="45720" tIns="18288" bIns="18288" anchor="ctr">
-            <a:spAutoFit/>
+            <a:noAutofit/>
           </a:bodyPr>
           <a:lstStyle/>
           <a:p>
@@ -8952,8 +8952,8 @@
         </p:nvSpPr>
         <p:spPr>
           <a:xfrm>
-            <a:off x="2252472" y="2171700"/>
-            <a:ext cx="3472688" cy="457200"/>
+            <a:off x="2606496" y="2171700"/>
+            <a:ext cx="3166062" cy="457200"/>
           </a:xfrm>
           <a:prstGeom prst="rect">
             <a:avLst/>
@@ -8962,7 +8962,7 @@
         </p:spPr>
         <p:txBody>
           <a:bodyPr wrap="none" lIns="45720" rIns="45720" tIns="18288" bIns="18288" anchor="ctr">
-            <a:spAutoFit/>
+            <a:noAutofit/>
           </a:bodyPr>
           <a:lstStyle/>
           <a:p>
@@ -8995,7 +8995,7 @@
         </p:blipFill>
         <p:spPr>
           <a:xfrm>
-            <a:off x="5588000" y="2223516"/>
+            <a:off x="5635398" y="2223516"/>
             <a:ext cx="1411224" cy="353568"/>
           </a:xfrm>
           <a:prstGeom prst="rect">
@@ -9011,8 +9011,8 @@
         </p:nvSpPr>
         <p:spPr>
           <a:xfrm>
-            <a:off x="6999223" y="2171700"/>
-            <a:ext cx="1240536" cy="457200"/>
+            <a:off x="7046622" y="2171700"/>
+            <a:ext cx="929845" cy="457200"/>
           </a:xfrm>
           <a:prstGeom prst="rect">
             <a:avLst/>
@@ -9021,7 +9021,7 @@
         </p:spPr>
         <p:txBody>
           <a:bodyPr wrap="none" lIns="45720" rIns="45720" tIns="18288" bIns="18288" anchor="ctr">
-            <a:spAutoFit/>
+            <a:noAutofit/>
           </a:bodyPr>
           <a:lstStyle/>
           <a:p>
@@ -9054,7 +9054,7 @@
         </p:blipFill>
         <p:spPr>
           <a:xfrm>
-            <a:off x="8102600" y="2223516"/>
+            <a:off x="7839308" y="2223516"/>
             <a:ext cx="1389888" cy="353568"/>
           </a:xfrm>
           <a:prstGeom prst="rect">
@@ -9070,8 +9070,8 @@
         </p:nvSpPr>
         <p:spPr>
           <a:xfrm>
-            <a:off x="9492488" y="2171700"/>
-            <a:ext cx="553720" cy="457200"/>
+            <a:off x="9229196" y="2171700"/>
+            <a:ext cx="462987" cy="457200"/>
           </a:xfrm>
           <a:prstGeom prst="rect">
             <a:avLst/>
@@ -9080,7 +9080,7 @@
         </p:spPr>
         <p:txBody>
           <a:bodyPr wrap="none" lIns="45720" rIns="45720" tIns="18288" bIns="18288" anchor="ctr">
-            <a:spAutoFit/>
+            <a:noAutofit/>
           </a:bodyPr>
           <a:lstStyle/>
           <a:p>
@@ -9438,8 +9438,8 @@
         </p:nvSpPr>
         <p:spPr>
           <a:xfrm>
-            <a:off x="2252472" y="2080260"/>
-            <a:ext cx="3472688" cy="457200"/>
+            <a:off x="2606496" y="2080260"/>
+            <a:ext cx="3166062" cy="457200"/>
           </a:xfrm>
           <a:prstGeom prst="rect">
             <a:avLst/>
@@ -9448,7 +9448,7 @@
         </p:spPr>
         <p:txBody>
           <a:bodyPr wrap="none" lIns="45720" rIns="45720" tIns="18288" bIns="18288" anchor="ctr">
-            <a:spAutoFit/>
+            <a:noAutofit/>
           </a:bodyPr>
           <a:lstStyle/>
           <a:p>
@@ -9481,7 +9481,7 @@
         </p:blipFill>
         <p:spPr>
           <a:xfrm>
-            <a:off x="5588000" y="2132076"/>
+            <a:off x="5635398" y="2132076"/>
             <a:ext cx="1411224" cy="353568"/>
           </a:xfrm>
           <a:prstGeom prst="rect">
@@ -9497,8 +9497,8 @@
         </p:nvSpPr>
         <p:spPr>
           <a:xfrm>
-            <a:off x="6999223" y="2080260"/>
-            <a:ext cx="1240536" cy="457200"/>
+            <a:off x="7046622" y="2080260"/>
+            <a:ext cx="929845" cy="457200"/>
           </a:xfrm>
           <a:prstGeom prst="rect">
             <a:avLst/>
@@ -9507,7 +9507,7 @@
         </p:spPr>
         <p:txBody>
           <a:bodyPr wrap="none" lIns="45720" rIns="45720" tIns="18288" bIns="18288" anchor="ctr">
-            <a:spAutoFit/>
+            <a:noAutofit/>
           </a:bodyPr>
           <a:lstStyle/>
           <a:p>
@@ -9540,7 +9540,7 @@
         </p:blipFill>
         <p:spPr>
           <a:xfrm>
-            <a:off x="8102600" y="2132076"/>
+            <a:off x="7839308" y="2132076"/>
             <a:ext cx="1389888" cy="353568"/>
           </a:xfrm>
           <a:prstGeom prst="rect">
@@ -9556,8 +9556,8 @@
         </p:nvSpPr>
         <p:spPr>
           <a:xfrm>
-            <a:off x="9492488" y="2080260"/>
-            <a:ext cx="553720" cy="457200"/>
+            <a:off x="9229196" y="2080260"/>
+            <a:ext cx="462987" cy="457200"/>
           </a:xfrm>
           <a:prstGeom prst="rect">
             <a:avLst/>
@@ -9566,7 +9566,7 @@
         </p:spPr>
         <p:txBody>
           <a:bodyPr wrap="none" lIns="45720" rIns="45720" tIns="18288" bIns="18288" anchor="ctr">
-            <a:spAutoFit/>
+            <a:noAutofit/>
           </a:bodyPr>
           <a:lstStyle/>
           <a:p>
@@ -11032,8 +11032,8 @@
         </p:nvSpPr>
         <p:spPr>
           <a:xfrm>
-            <a:off x="1772411" y="2171700"/>
-            <a:ext cx="4674616" cy="457200"/>
+            <a:off x="1989919" y="2171700"/>
+            <a:ext cx="4558064" cy="457200"/>
           </a:xfrm>
           <a:prstGeom prst="rect">
             <a:avLst/>
@@ -11042,7 +11042,7 @@
         </p:spPr>
         <p:txBody>
           <a:bodyPr wrap="none" lIns="45720" rIns="45720" tIns="18288" bIns="18288" anchor="ctr">
-            <a:spAutoFit/>
+            <a:noAutofit/>
           </a:bodyPr>
           <a:lstStyle/>
           <a:p>
@@ -11075,7 +11075,7 @@
         </p:blipFill>
         <p:spPr>
           <a:xfrm>
-            <a:off x="6309867" y="2225040"/>
+            <a:off x="6410824" y="2225040"/>
             <a:ext cx="1109472" cy="350520"/>
           </a:xfrm>
           <a:prstGeom prst="rect">
@@ -11091,8 +11091,8 @@
         </p:nvSpPr>
         <p:spPr>
           <a:xfrm>
-            <a:off x="7419339" y="2171700"/>
-            <a:ext cx="1583944" cy="457200"/>
+            <a:off x="7520296" y="2171700"/>
+            <a:ext cx="1356212" cy="457200"/>
           </a:xfrm>
           <a:prstGeom prst="rect">
             <a:avLst/>
@@ -11101,7 +11101,7 @@
         </p:spPr>
         <p:txBody>
           <a:bodyPr wrap="none" lIns="45720" rIns="45720" tIns="18288" bIns="18288" anchor="ctr">
-            <a:spAutoFit/>
+            <a:noAutofit/>
           </a:bodyPr>
           <a:lstStyle/>
           <a:p>
@@ -11134,7 +11134,7 @@
         </p:blipFill>
         <p:spPr>
           <a:xfrm>
-            <a:off x="8866123" y="2223516"/>
+            <a:off x="8739348" y="2223516"/>
             <a:ext cx="1106424" cy="353568"/>
           </a:xfrm>
           <a:prstGeom prst="rect">
@@ -11150,8 +11150,8 @@
         </p:nvSpPr>
         <p:spPr>
           <a:xfrm>
-            <a:off x="9972547" y="2171700"/>
-            <a:ext cx="553720" cy="457200"/>
+            <a:off x="9845772" y="2171700"/>
+            <a:ext cx="462987" cy="457200"/>
           </a:xfrm>
           <a:prstGeom prst="rect">
             <a:avLst/>
@@ -11160,7 +11160,7 @@
         </p:spPr>
         <p:txBody>
           <a:bodyPr wrap="none" lIns="45720" rIns="45720" tIns="18288" bIns="18288" anchor="ctr">
-            <a:spAutoFit/>
+            <a:noAutofit/>
           </a:bodyPr>
           <a:lstStyle/>
           <a:p>
@@ -11659,8 +11659,8 @@
         </p:nvSpPr>
         <p:spPr>
           <a:xfrm>
-            <a:off x="1772411" y="2080260"/>
-            <a:ext cx="4674616" cy="457200"/>
+            <a:off x="1989919" y="2080260"/>
+            <a:ext cx="4558064" cy="457200"/>
           </a:xfrm>
           <a:prstGeom prst="rect">
             <a:avLst/>
@@ -11669,7 +11669,7 @@
         </p:spPr>
         <p:txBody>
           <a:bodyPr wrap="none" lIns="45720" rIns="45720" tIns="18288" bIns="18288" anchor="ctr">
-            <a:spAutoFit/>
+            <a:noAutofit/>
           </a:bodyPr>
           <a:lstStyle/>
           <a:p>
@@ -11702,7 +11702,7 @@
         </p:blipFill>
         <p:spPr>
           <a:xfrm>
-            <a:off x="6309867" y="2133599"/>
+            <a:off x="6410824" y="2133599"/>
             <a:ext cx="1109472" cy="350520"/>
           </a:xfrm>
           <a:prstGeom prst="rect">
@@ -11718,8 +11718,8 @@
         </p:nvSpPr>
         <p:spPr>
           <a:xfrm>
-            <a:off x="7419339" y="2080260"/>
-            <a:ext cx="1583944" cy="457200"/>
+            <a:off x="7520296" y="2080260"/>
+            <a:ext cx="1356212" cy="457200"/>
           </a:xfrm>
           <a:prstGeom prst="rect">
             <a:avLst/>
@@ -11728,7 +11728,7 @@
         </p:spPr>
         <p:txBody>
           <a:bodyPr wrap="none" lIns="45720" rIns="45720" tIns="18288" bIns="18288" anchor="ctr">
-            <a:spAutoFit/>
+            <a:noAutofit/>
           </a:bodyPr>
           <a:lstStyle/>
           <a:p>
@@ -11761,7 +11761,7 @@
         </p:blipFill>
         <p:spPr>
           <a:xfrm>
-            <a:off x="8866123" y="2132076"/>
+            <a:off x="8739348" y="2132076"/>
             <a:ext cx="1106424" cy="353568"/>
           </a:xfrm>
           <a:prstGeom prst="rect">
@@ -11777,8 +11777,8 @@
         </p:nvSpPr>
         <p:spPr>
           <a:xfrm>
-            <a:off x="9972547" y="2080260"/>
-            <a:ext cx="553720" cy="457200"/>
+            <a:off x="9845772" y="2080260"/>
+            <a:ext cx="462987" cy="457200"/>
           </a:xfrm>
           <a:prstGeom prst="rect">
             <a:avLst/>
@@ -11787,7 +11787,7 @@
         </p:spPr>
         <p:txBody>
           <a:bodyPr wrap="none" lIns="45720" rIns="45720" tIns="18288" bIns="18288" anchor="ctr">
-            <a:spAutoFit/>
+            <a:noAutofit/>
           </a:bodyPr>
           <a:lstStyle/>
           <a:p>
@@ -12286,8 +12286,8 @@
         </p:nvSpPr>
         <p:spPr>
           <a:xfrm>
-            <a:off x="1461515" y="2171700"/>
-            <a:ext cx="4674616" cy="457200"/>
+            <a:off x="1679023" y="2171700"/>
+            <a:ext cx="4558064" cy="457200"/>
           </a:xfrm>
           <a:prstGeom prst="rect">
             <a:avLst/>
@@ -12296,7 +12296,7 @@
         </p:spPr>
         <p:txBody>
           <a:bodyPr wrap="none" lIns="45720" rIns="45720" tIns="18288" bIns="18288" anchor="ctr">
-            <a:spAutoFit/>
+            <a:noAutofit/>
           </a:bodyPr>
           <a:lstStyle/>
           <a:p>
@@ -12329,7 +12329,7 @@
         </p:blipFill>
         <p:spPr>
           <a:xfrm>
-            <a:off x="5998972" y="2223516"/>
+            <a:off x="6099928" y="2223516"/>
             <a:ext cx="1411224" cy="353568"/>
           </a:xfrm>
           <a:prstGeom prst="rect">
@@ -12345,8 +12345,8 @@
         </p:nvSpPr>
         <p:spPr>
           <a:xfrm>
-            <a:off x="7410196" y="2171700"/>
-            <a:ext cx="1583944" cy="457200"/>
+            <a:off x="7511152" y="2171700"/>
+            <a:ext cx="1356212" cy="457200"/>
           </a:xfrm>
           <a:prstGeom prst="rect">
             <a:avLst/>
@@ -12355,7 +12355,7 @@
         </p:spPr>
         <p:txBody>
           <a:bodyPr wrap="none" lIns="45720" rIns="45720" tIns="18288" bIns="18288" anchor="ctr">
-            <a:spAutoFit/>
+            <a:noAutofit/>
           </a:bodyPr>
           <a:lstStyle/>
           <a:p>
@@ -12388,7 +12388,7 @@
         </p:blipFill>
         <p:spPr>
           <a:xfrm>
-            <a:off x="8856980" y="2225040"/>
+            <a:off x="8730204" y="2225040"/>
             <a:ext cx="1426464" cy="350520"/>
           </a:xfrm>
           <a:prstGeom prst="rect">
@@ -12404,8 +12404,8 @@
         </p:nvSpPr>
         <p:spPr>
           <a:xfrm>
-            <a:off x="10283444" y="2171700"/>
-            <a:ext cx="553720" cy="457200"/>
+            <a:off x="10156668" y="2171700"/>
+            <a:ext cx="462987" cy="457200"/>
           </a:xfrm>
           <a:prstGeom prst="rect">
             <a:avLst/>
@@ -12414,7 +12414,7 @@
         </p:spPr>
         <p:txBody>
           <a:bodyPr wrap="none" lIns="45720" rIns="45720" tIns="18288" bIns="18288" anchor="ctr">
-            <a:spAutoFit/>
+            <a:noAutofit/>
           </a:bodyPr>
           <a:lstStyle/>
           <a:p>
@@ -12772,8 +12772,8 @@
         </p:nvSpPr>
         <p:spPr>
           <a:xfrm>
-            <a:off x="1461515" y="2080260"/>
-            <a:ext cx="4674616" cy="457200"/>
+            <a:off x="1679023" y="2080260"/>
+            <a:ext cx="4558064" cy="457200"/>
           </a:xfrm>
           <a:prstGeom prst="rect">
             <a:avLst/>
@@ -12782,7 +12782,7 @@
         </p:spPr>
         <p:txBody>
           <a:bodyPr wrap="none" lIns="45720" rIns="45720" tIns="18288" bIns="18288" anchor="ctr">
-            <a:spAutoFit/>
+            <a:noAutofit/>
           </a:bodyPr>
           <a:lstStyle/>
           <a:p>
@@ -12815,7 +12815,7 @@
         </p:blipFill>
         <p:spPr>
           <a:xfrm>
-            <a:off x="5998972" y="2132076"/>
+            <a:off x="6099928" y="2132076"/>
             <a:ext cx="1411224" cy="353568"/>
           </a:xfrm>
           <a:prstGeom prst="rect">
@@ -12831,8 +12831,8 @@
         </p:nvSpPr>
         <p:spPr>
           <a:xfrm>
-            <a:off x="7410196" y="2080260"/>
-            <a:ext cx="1583944" cy="457200"/>
+            <a:off x="7511152" y="2080260"/>
+            <a:ext cx="1356212" cy="457200"/>
           </a:xfrm>
           <a:prstGeom prst="rect">
             <a:avLst/>
@@ -12841,7 +12841,7 @@
         </p:spPr>
         <p:txBody>
           <a:bodyPr wrap="none" lIns="45720" rIns="45720" tIns="18288" bIns="18288" anchor="ctr">
-            <a:spAutoFit/>
+            <a:noAutofit/>
           </a:bodyPr>
           <a:lstStyle/>
           <a:p>
@@ -12874,7 +12874,7 @@
         </p:blipFill>
         <p:spPr>
           <a:xfrm>
-            <a:off x="8856980" y="2133599"/>
+            <a:off x="8730204" y="2133599"/>
             <a:ext cx="1426464" cy="350520"/>
           </a:xfrm>
           <a:prstGeom prst="rect">
@@ -12890,8 +12890,8 @@
         </p:nvSpPr>
         <p:spPr>
           <a:xfrm>
-            <a:off x="10283444" y="2080260"/>
-            <a:ext cx="553720" cy="457200"/>
+            <a:off x="10156668" y="2080260"/>
+            <a:ext cx="462987" cy="457200"/>
           </a:xfrm>
           <a:prstGeom prst="rect">
             <a:avLst/>
@@ -12900,7 +12900,7 @@
         </p:spPr>
         <p:txBody>
           <a:bodyPr wrap="none" lIns="45720" rIns="45720" tIns="18288" bIns="18288" anchor="ctr">
-            <a:spAutoFit/>
+            <a:noAutofit/>
           </a:bodyPr>
           <a:lstStyle/>
           <a:p>
@@ -13671,7 +13671,7 @@
         <p:spPr>
           <a:xfrm>
             <a:off x="1874519" y="1760220"/>
-            <a:ext cx="6285992" cy="457200"/>
+            <a:ext cx="5670993" cy="457200"/>
           </a:xfrm>
           <a:prstGeom prst="rect">
             <a:avLst/>
@@ -13680,7 +13680,7 @@
         </p:spPr>
         <p:txBody>
           <a:bodyPr wrap="none" lIns="45720" rIns="45720" tIns="18288" bIns="18288" anchor="ctr">
-            <a:spAutoFit/>
+            <a:noAutofit/>
           </a:bodyPr>
           <a:lstStyle/>
           <a:p>
@@ -13713,7 +13713,7 @@
         </p:blipFill>
         <p:spPr>
           <a:xfrm>
-            <a:off x="8023352" y="1850136"/>
+            <a:off x="7408353" y="1850136"/>
             <a:ext cx="585216" cy="277368"/>
           </a:xfrm>
           <a:prstGeom prst="rect">
@@ -13729,8 +13729,8 @@
         </p:nvSpPr>
         <p:spPr>
           <a:xfrm>
-            <a:off x="9157208" y="1760220"/>
-            <a:ext cx="887983" cy="457200"/>
+            <a:off x="8542209" y="1760220"/>
+            <a:ext cx="769826" cy="457200"/>
           </a:xfrm>
           <a:prstGeom prst="rect">
             <a:avLst/>
@@ -13739,7 +13739,7 @@
         </p:spPr>
         <p:txBody>
           <a:bodyPr wrap="none" lIns="45720" rIns="45720" tIns="18288" bIns="18288" anchor="ctr">
-            <a:spAutoFit/>
+            <a:noAutofit/>
           </a:bodyPr>
           <a:lstStyle/>
           <a:p>
@@ -13774,7 +13774,7 @@
         <p:spPr>
           <a:xfrm>
             <a:off x="1874519" y="2372868"/>
-            <a:ext cx="3551936" cy="457200"/>
+            <a:ext cx="3064939" cy="457200"/>
           </a:xfrm>
           <a:prstGeom prst="rect">
             <a:avLst/>
@@ -13783,7 +13783,7 @@
         </p:spPr>
         <p:txBody>
           <a:bodyPr wrap="none" lIns="45720" rIns="45720" tIns="18288" bIns="18288" anchor="ctr">
-            <a:spAutoFit/>
+            <a:noAutofit/>
           </a:bodyPr>
           <a:lstStyle/>
           <a:p>
@@ -13816,7 +13816,7 @@
         </p:blipFill>
         <p:spPr>
           <a:xfrm>
-            <a:off x="5289296" y="2433828"/>
+            <a:off x="4802299" y="2433828"/>
             <a:ext cx="774192" cy="335280"/>
           </a:xfrm>
           <a:prstGeom prst="rect">
@@ -13832,8 +13832,8 @@
         </p:nvSpPr>
         <p:spPr>
           <a:xfrm>
-            <a:off x="6612128" y="2372868"/>
-            <a:ext cx="2751582" cy="457200"/>
+            <a:off x="6125131" y="2372868"/>
+            <a:ext cx="2426493" cy="457200"/>
           </a:xfrm>
           <a:prstGeom prst="rect">
             <a:avLst/>
@@ -13842,7 +13842,7 @@
         </p:spPr>
         <p:txBody>
           <a:bodyPr wrap="none" lIns="45720" rIns="45720" tIns="18288" bIns="18288" anchor="ctr">
-            <a:spAutoFit/>
+            <a:noAutofit/>
           </a:bodyPr>
           <a:lstStyle/>
           <a:p>
@@ -13886,7 +13886,7 @@
         <p:spPr>
           <a:xfrm>
             <a:off x="1874519" y="2985516"/>
-            <a:ext cx="3551936" cy="457200"/>
+            <a:ext cx="3064939" cy="457200"/>
           </a:xfrm>
           <a:prstGeom prst="rect">
             <a:avLst/>
@@ -13895,7 +13895,7 @@
         </p:spPr>
         <p:txBody>
           <a:bodyPr wrap="none" lIns="45720" rIns="45720" tIns="18288" bIns="18288" anchor="ctr">
-            <a:spAutoFit/>
+            <a:noAutofit/>
           </a:bodyPr>
           <a:lstStyle/>
           <a:p>
@@ -13928,7 +13928,7 @@
         </p:blipFill>
         <p:spPr>
           <a:xfrm>
-            <a:off x="5289296" y="3009900"/>
+            <a:off x="4802299" y="3009900"/>
             <a:ext cx="853440" cy="408432"/>
           </a:xfrm>
           <a:prstGeom prst="rect">
@@ -13944,8 +13944,8 @@
         </p:nvSpPr>
         <p:spPr>
           <a:xfrm>
-            <a:off x="6691376" y="2985516"/>
-            <a:ext cx="549148" cy="457200"/>
+            <a:off x="6204379" y="2985516"/>
+            <a:ext cx="565792" cy="457200"/>
           </a:xfrm>
           <a:prstGeom prst="rect">
             <a:avLst/>
@@ -13954,7 +13954,7 @@
         </p:spPr>
         <p:txBody>
           <a:bodyPr wrap="none" lIns="45720" rIns="45720" tIns="18288" bIns="18288" anchor="ctr">
-            <a:spAutoFit/>
+            <a:noAutofit/>
           </a:bodyPr>
           <a:lstStyle/>
           <a:p>
@@ -13980,7 +13980,7 @@
         <p:spPr>
           <a:xfrm>
             <a:off x="1874519" y="3598164"/>
-            <a:ext cx="6741668" cy="457200"/>
+            <a:ext cx="5997604" cy="457200"/>
           </a:xfrm>
           <a:prstGeom prst="rect">
             <a:avLst/>
@@ -13989,7 +13989,7 @@
         </p:spPr>
         <p:txBody>
           <a:bodyPr wrap="none" lIns="45720" rIns="45720" tIns="18288" bIns="18288" anchor="ctr">
-            <a:spAutoFit/>
+            <a:noAutofit/>
           </a:bodyPr>
           <a:lstStyle/>
           <a:p>
@@ -14014,8 +14014,8 @@
         </p:nvSpPr>
         <p:spPr>
           <a:xfrm>
-            <a:off x="9027668" y="3598164"/>
-            <a:ext cx="1565655" cy="457200"/>
+            <a:off x="8283604" y="3598164"/>
+            <a:ext cx="1511761" cy="457200"/>
           </a:xfrm>
           <a:prstGeom prst="rect">
             <a:avLst/>
@@ -14024,7 +14024,7 @@
         </p:spPr>
         <p:txBody>
           <a:bodyPr wrap="none" lIns="45720" rIns="45720" tIns="18288" bIns="18288" anchor="ctr">
-            <a:spAutoFit/>
+            <a:noAutofit/>
           </a:bodyPr>
           <a:lstStyle/>
           <a:p>
@@ -14724,8 +14724,8 @@
         </p:nvSpPr>
         <p:spPr>
           <a:xfrm>
-            <a:off x="2690875" y="2171700"/>
-            <a:ext cx="5361432" cy="457200"/>
+            <a:off x="2894026" y="2171700"/>
+            <a:ext cx="5029550" cy="457200"/>
           </a:xfrm>
           <a:prstGeom prst="rect">
             <a:avLst/>
@@ -14734,7 +14734,7 @@
         </p:spPr>
         <p:txBody>
           <a:bodyPr wrap="none" lIns="45720" rIns="45720" tIns="18288" bIns="18288" anchor="ctr">
-            <a:spAutoFit/>
+            <a:noAutofit/>
           </a:bodyPr>
           <a:lstStyle/>
           <a:p>
@@ -14767,7 +14767,7 @@
         </p:blipFill>
         <p:spPr>
           <a:xfrm>
-            <a:off x="7915148" y="2223516"/>
+            <a:off x="7786417" y="2223516"/>
             <a:ext cx="1310640" cy="353568"/>
           </a:xfrm>
           <a:prstGeom prst="rect">
@@ -14783,8 +14783,8 @@
         </p:nvSpPr>
         <p:spPr>
           <a:xfrm>
-            <a:off x="9225788" y="2171700"/>
-            <a:ext cx="382016" cy="457200"/>
+            <a:off x="9097057" y="2171700"/>
+            <a:ext cx="307595" cy="457200"/>
           </a:xfrm>
           <a:prstGeom prst="rect">
             <a:avLst/>
@@ -14793,7 +14793,7 @@
         </p:spPr>
         <p:txBody>
           <a:bodyPr wrap="none" lIns="45720" rIns="45720" tIns="18288" bIns="18288" anchor="ctr">
-            <a:spAutoFit/>
+            <a:noAutofit/>
           </a:bodyPr>
           <a:lstStyle/>
           <a:p>
@@ -15186,8 +15186,8 @@
         </p:nvSpPr>
         <p:spPr>
           <a:xfrm>
-            <a:off x="2690875" y="2080260"/>
-            <a:ext cx="5361432" cy="457200"/>
+            <a:off x="2894026" y="2080260"/>
+            <a:ext cx="5029550" cy="457200"/>
           </a:xfrm>
           <a:prstGeom prst="rect">
             <a:avLst/>
@@ -15196,7 +15196,7 @@
         </p:spPr>
         <p:txBody>
           <a:bodyPr wrap="none" lIns="45720" rIns="45720" tIns="18288" bIns="18288" anchor="ctr">
-            <a:spAutoFit/>
+            <a:noAutofit/>
           </a:bodyPr>
           <a:lstStyle/>
           <a:p>
@@ -15229,7 +15229,7 @@
         </p:blipFill>
         <p:spPr>
           <a:xfrm>
-            <a:off x="7915148" y="2132076"/>
+            <a:off x="7786417" y="2132076"/>
             <a:ext cx="1310640" cy="353568"/>
           </a:xfrm>
           <a:prstGeom prst="rect">
@@ -15245,8 +15245,8 @@
         </p:nvSpPr>
         <p:spPr>
           <a:xfrm>
-            <a:off x="9225788" y="2080260"/>
-            <a:ext cx="382016" cy="457200"/>
+            <a:off x="9097057" y="2080260"/>
+            <a:ext cx="307595" cy="457200"/>
           </a:xfrm>
           <a:prstGeom prst="rect">
             <a:avLst/>
@@ -15255,7 +15255,7 @@
         </p:spPr>
         <p:txBody>
           <a:bodyPr wrap="none" lIns="45720" rIns="45720" tIns="18288" bIns="18288" anchor="ctr">
-            <a:spAutoFit/>
+            <a:noAutofit/>
           </a:bodyPr>
           <a:lstStyle/>
           <a:p>
@@ -17815,7 +17815,7 @@
         </p:blipFill>
         <p:spPr>
           <a:xfrm>
-            <a:off x="3847591" y="2403348"/>
+            <a:off x="4048840" y="2403348"/>
             <a:ext cx="1124712" cy="286512"/>
           </a:xfrm>
           <a:prstGeom prst="rect">
@@ -17831,8 +17831,8 @@
         </p:nvSpPr>
         <p:spPr>
           <a:xfrm>
-            <a:off x="4972303" y="2318004"/>
-            <a:ext cx="1927352" cy="457200"/>
+            <a:off x="5173552" y="2318004"/>
+            <a:ext cx="1524855" cy="457200"/>
           </a:xfrm>
           <a:prstGeom prst="rect">
             <a:avLst/>
@@ -17841,7 +17841,7 @@
         </p:spPr>
         <p:txBody>
           <a:bodyPr wrap="none" lIns="45720" rIns="45720" tIns="18288" bIns="18288" anchor="ctr">
-            <a:spAutoFit/>
+            <a:noAutofit/>
           </a:bodyPr>
           <a:lstStyle/>
           <a:p>
@@ -17874,7 +17874,7 @@
         </p:blipFill>
         <p:spPr>
           <a:xfrm>
-            <a:off x="6762496" y="2388108"/>
+            <a:off x="6561247" y="2388108"/>
             <a:ext cx="1551432" cy="316992"/>
           </a:xfrm>
           <a:prstGeom prst="rect">
@@ -17898,7 +17898,7 @@
         </p:blipFill>
         <p:spPr>
           <a:xfrm>
-            <a:off x="1794764" y="3032760"/>
+            <a:off x="2166864" y="3032760"/>
             <a:ext cx="3139440" cy="399288"/>
           </a:xfrm>
           <a:prstGeom prst="rect">
@@ -17914,8 +17914,8 @@
         </p:nvSpPr>
         <p:spPr>
           <a:xfrm>
-            <a:off x="4934204" y="3003804"/>
-            <a:ext cx="1927352" cy="457200"/>
+            <a:off x="5306304" y="3003804"/>
+            <a:ext cx="1183151" cy="457200"/>
           </a:xfrm>
           <a:prstGeom prst="rect">
             <a:avLst/>
@@ -17924,7 +17924,7 @@
         </p:spPr>
         <p:txBody>
           <a:bodyPr wrap="none" lIns="45720" rIns="45720" tIns="18288" bIns="18288" anchor="ctr">
-            <a:spAutoFit/>
+            <a:noAutofit/>
           </a:bodyPr>
           <a:lstStyle/>
           <a:p>
@@ -17957,7 +17957,7 @@
         </p:blipFill>
         <p:spPr>
           <a:xfrm>
-            <a:off x="6724396" y="3037332"/>
+            <a:off x="6352295" y="3037332"/>
             <a:ext cx="3642360" cy="390144"/>
           </a:xfrm>
           <a:prstGeom prst="rect">
@@ -18353,7 +18353,7 @@
       </p:cxnSp>
       <p:pic>
         <p:nvPicPr>
-          <p:cNvPr id="10" name="Picture 9" descr="098e87f3d4c2e55a.png"/>
+          <p:cNvPr id="10" name="Picture 9" descr="31406438abbd7eb7.png"/>
           <p:cNvPicPr>
             <a:picLocks noChangeAspect="1"/>
           </p:cNvPicPr>
@@ -18367,8 +18367,8 @@
         </p:blipFill>
         <p:spPr>
           <a:xfrm>
-            <a:off x="2791460" y="2348484"/>
-            <a:ext cx="1661160" cy="606552"/>
+            <a:off x="2770368" y="2348484"/>
+            <a:ext cx="2100072" cy="813816"/>
           </a:xfrm>
           <a:prstGeom prst="rect">
             <a:avLst/>
@@ -18383,8 +18383,8 @@
         </p:nvSpPr>
         <p:spPr>
           <a:xfrm>
-            <a:off x="4452620" y="2423160"/>
-            <a:ext cx="1927352" cy="457200"/>
+            <a:off x="4870440" y="2526792"/>
+            <a:ext cx="1183151" cy="457200"/>
           </a:xfrm>
           <a:prstGeom prst="rect">
             <a:avLst/>
@@ -18393,7 +18393,7 @@
         </p:spPr>
         <p:txBody>
           <a:bodyPr wrap="none" lIns="45720" rIns="45720" tIns="18288" bIns="18288" anchor="ctr">
-            <a:spAutoFit/>
+            <a:noAutofit/>
           </a:bodyPr>
           <a:lstStyle/>
           <a:p>
@@ -18412,7 +18412,7 @@
       </p:sp>
       <p:pic>
         <p:nvPicPr>
-          <p:cNvPr id="12" name="Picture 11" descr="acfb06df0f3fd1a4.png"/>
+          <p:cNvPr id="12" name="Picture 11" descr="8f39ef09a5574063.png"/>
           <p:cNvPicPr>
             <a:picLocks noChangeAspect="1"/>
           </p:cNvPicPr>
@@ -18426,8 +18426,8 @@
         </p:blipFill>
         <p:spPr>
           <a:xfrm>
-            <a:off x="6242812" y="2340864"/>
-            <a:ext cx="3127248" cy="621792"/>
+            <a:off x="5916431" y="2340864"/>
+            <a:ext cx="3474720" cy="829056"/>
           </a:xfrm>
           <a:prstGeom prst="rect">
             <a:avLst/>
@@ -18436,7 +18436,7 @@
       </p:pic>
       <p:pic>
         <p:nvPicPr>
-          <p:cNvPr id="13" name="Picture 12" descr="eed5e56150e7cd23.png"/>
+          <p:cNvPr id="13" name="Picture 12" descr="22a7f0f67c296906.png"/>
           <p:cNvPicPr>
             <a:picLocks noChangeAspect="1"/>
           </p:cNvPicPr>
@@ -18450,8 +18450,8 @@
         </p:blipFill>
         <p:spPr>
           <a:xfrm>
-            <a:off x="4271771" y="3236976"/>
-            <a:ext cx="3617976" cy="615696"/>
+            <a:off x="4052316" y="3444240"/>
+            <a:ext cx="4056888" cy="829056"/>
           </a:xfrm>
           <a:prstGeom prst="rect">
             <a:avLst/>
@@ -18466,7 +18466,7 @@
         </p:nvSpPr>
         <p:spPr>
           <a:xfrm>
-            <a:off x="987552" y="4190999"/>
+            <a:off x="987552" y="4611624"/>
             <a:ext cx="10131551" cy="475488"/>
           </a:xfrm>
           <a:prstGeom prst="rect">
@@ -18501,7 +18501,7 @@
         </p:nvSpPr>
         <p:spPr>
           <a:xfrm>
-            <a:off x="987552" y="4922520"/>
+            <a:off x="987552" y="5343144"/>
             <a:ext cx="10131551" cy="475488"/>
           </a:xfrm>
           <a:prstGeom prst="rect">

--- a/a7/packages/A7 Unit 3 - Exponents and Scientific Notation/Slides/A7 3.08  Slides.pptx
+++ b/a7/packages/A7 Unit 3 - Exponents and Scientific Notation/Slides/A7 3.08  Slides.pptx
@@ -4610,7 +4610,7 @@
       </p:sp>
       <p:pic>
         <p:nvPicPr>
-          <p:cNvPr id="9" name="Picture 8" descr="862d7a83bd8e2fe0.png"/>
+          <p:cNvPr id="9" name="Picture 8" descr="442927616471d185.png"/>
           <p:cNvPicPr>
             <a:picLocks noChangeAspect="1"/>
           </p:cNvPicPr>
@@ -4625,7 +4625,7 @@
         <p:spPr>
           <a:xfrm>
             <a:off x="1828800" y="1920240"/>
-            <a:ext cx="1438656" cy="688848"/>
+            <a:ext cx="1450848" cy="691896"/>
           </a:xfrm>
           <a:prstGeom prst="rect">
             <a:avLst/>
@@ -4640,7 +4640,7 @@
         </p:nvSpPr>
         <p:spPr>
           <a:xfrm>
-            <a:off x="3724656" y="2036064"/>
+            <a:off x="3736848" y="2037588"/>
             <a:ext cx="6400800" cy="502920"/>
           </a:xfrm>
           <a:prstGeom prst="rect">
@@ -4669,7 +4669,7 @@
       </p:sp>
       <p:pic>
         <p:nvPicPr>
-          <p:cNvPr id="11" name="Picture 10" descr="b1fb3cad81ed9316.png"/>
+          <p:cNvPr id="11" name="Picture 10" descr="0ffc80c57552c6a0.png"/>
           <p:cNvPicPr>
             <a:picLocks noChangeAspect="1"/>
           </p:cNvPicPr>
@@ -4683,8 +4683,8 @@
         </p:blipFill>
         <p:spPr>
           <a:xfrm>
-            <a:off x="1828800" y="2883408"/>
-            <a:ext cx="2386584" cy="810768"/>
+            <a:off x="1828800" y="2886456"/>
+            <a:ext cx="2395728" cy="807720"/>
           </a:xfrm>
           <a:prstGeom prst="rect">
             <a:avLst/>
@@ -4699,7 +4699,7 @@
         </p:nvSpPr>
         <p:spPr>
           <a:xfrm>
-            <a:off x="4672583" y="3060192"/>
+            <a:off x="4681728" y="3061716"/>
             <a:ext cx="6400800" cy="502920"/>
           </a:xfrm>
           <a:prstGeom prst="rect">
@@ -4728,7 +4728,7 @@
       </p:sp>
       <p:pic>
         <p:nvPicPr>
-          <p:cNvPr id="13" name="Picture 12" descr="433f8052cac9cb2f.png"/>
+          <p:cNvPr id="13" name="Picture 12" descr="c1efb007aba27120.png"/>
           <p:cNvPicPr>
             <a:picLocks noChangeAspect="1"/>
           </p:cNvPicPr>
@@ -4743,7 +4743,7 @@
         <p:spPr>
           <a:xfrm>
             <a:off x="1828800" y="3968496"/>
-            <a:ext cx="2026920" cy="289560"/>
+            <a:ext cx="2026920" cy="292608"/>
           </a:xfrm>
           <a:prstGeom prst="rect">
             <a:avLst/>
@@ -4758,7 +4758,7 @@
         </p:nvSpPr>
         <p:spPr>
           <a:xfrm>
-            <a:off x="4312920" y="3884675"/>
+            <a:off x="4312920" y="3886200"/>
             <a:ext cx="6400800" cy="502920"/>
           </a:xfrm>
           <a:prstGeom prst="rect">
@@ -4793,7 +4793,7 @@
         </p:nvSpPr>
         <p:spPr>
           <a:xfrm>
-            <a:off x="777240" y="4715256"/>
+            <a:off x="777240" y="4718304"/>
             <a:ext cx="10607040" cy="548640"/>
           </a:xfrm>
           <a:prstGeom prst="rect">
@@ -5536,7 +5536,7 @@
       </p:sp>
       <p:pic>
         <p:nvPicPr>
-          <p:cNvPr id="10" name="Picture 9" descr="b3b23388699e71f0.png"/>
+          <p:cNvPr id="10" name="Picture 9" descr="4a122d0a8ad78980.png"/>
           <p:cNvPicPr>
             <a:picLocks noChangeAspect="1"/>
           </p:cNvPicPr>
@@ -5595,7 +5595,7 @@
       </p:sp>
       <p:pic>
         <p:nvPicPr>
-          <p:cNvPr id="12" name="Picture 11" descr="33ace73c84f9ae31.png"/>
+          <p:cNvPr id="12" name="Picture 11" descr="1751163183b0020d.png"/>
           <p:cNvPicPr>
             <a:picLocks noChangeAspect="1"/>
           </p:cNvPicPr>
@@ -7165,7 +7165,7 @@
         </p:nvSpPr>
         <p:spPr>
           <a:xfrm>
-            <a:off x="3230641" y="2080260"/>
+            <a:off x="3232165" y="2080260"/>
             <a:ext cx="1311040" cy="457200"/>
           </a:xfrm>
           <a:prstGeom prst="rect">
@@ -7194,7 +7194,7 @@
       </p:sp>
       <p:pic>
         <p:nvPicPr>
-          <p:cNvPr id="10" name="Picture 9" descr="5f1494d210188d7e.png"/>
+          <p:cNvPr id="10" name="Picture 9" descr="5cf8cb07a78986c2.png"/>
           <p:cNvPicPr>
             <a:picLocks noChangeAspect="1"/>
           </p:cNvPicPr>
@@ -7208,8 +7208,8 @@
         </p:blipFill>
         <p:spPr>
           <a:xfrm>
-            <a:off x="4404522" y="2133599"/>
-            <a:ext cx="1429512" cy="350520"/>
+            <a:off x="4406046" y="2132076"/>
+            <a:ext cx="1426464" cy="353568"/>
           </a:xfrm>
           <a:prstGeom prst="rect">
             <a:avLst/>
@@ -7224,7 +7224,7 @@
         </p:nvSpPr>
         <p:spPr>
           <a:xfrm>
-            <a:off x="5834034" y="2080260"/>
+            <a:off x="5832510" y="2080260"/>
             <a:ext cx="3234003" cy="457200"/>
           </a:xfrm>
           <a:prstGeom prst="rect">
@@ -9467,7 +9467,7 @@
       </p:sp>
       <p:pic>
         <p:nvPicPr>
-          <p:cNvPr id="10" name="Picture 9" descr="1ab45d017fce8a10.png"/>
+          <p:cNvPr id="10" name="Picture 9" descr="497497aa864fbaa1.png"/>
           <p:cNvPicPr>
             <a:picLocks noChangeAspect="1"/>
           </p:cNvPicPr>
@@ -9482,7 +9482,7 @@
         <p:spPr>
           <a:xfrm>
             <a:off x="5635398" y="2132076"/>
-            <a:ext cx="1411224" cy="353568"/>
+            <a:ext cx="1414272" cy="353568"/>
           </a:xfrm>
           <a:prstGeom prst="rect">
             <a:avLst/>
@@ -9497,7 +9497,7 @@
         </p:nvSpPr>
         <p:spPr>
           <a:xfrm>
-            <a:off x="7046622" y="2080260"/>
+            <a:off x="7049670" y="2080260"/>
             <a:ext cx="929845" cy="457200"/>
           </a:xfrm>
           <a:prstGeom prst="rect">
@@ -9526,7 +9526,7 @@
       </p:sp>
       <p:pic>
         <p:nvPicPr>
-          <p:cNvPr id="12" name="Picture 11" descr="d99a9851995ad560.png"/>
+          <p:cNvPr id="12" name="Picture 11" descr="86019fcf1f04e7bc.png"/>
           <p:cNvPicPr>
             <a:picLocks noChangeAspect="1"/>
           </p:cNvPicPr>
@@ -9540,8 +9540,8 @@
         </p:blipFill>
         <p:spPr>
           <a:xfrm>
-            <a:off x="7839308" y="2132076"/>
-            <a:ext cx="1389888" cy="353568"/>
+            <a:off x="7842356" y="2130551"/>
+            <a:ext cx="1386840" cy="356616"/>
           </a:xfrm>
           <a:prstGeom prst="rect">
             <a:avLst/>
@@ -11659,7 +11659,7 @@
         </p:nvSpPr>
         <p:spPr>
           <a:xfrm>
-            <a:off x="1989919" y="2080260"/>
+            <a:off x="1991443" y="2080260"/>
             <a:ext cx="4558064" cy="457200"/>
           </a:xfrm>
           <a:prstGeom prst="rect">
@@ -11688,7 +11688,7 @@
       </p:sp>
       <p:pic>
         <p:nvPicPr>
-          <p:cNvPr id="10" name="Picture 9" descr="cb3383a0ac48947d.png"/>
+          <p:cNvPr id="10" name="Picture 9" descr="f0145cdff15a98d0.png"/>
           <p:cNvPicPr>
             <a:picLocks noChangeAspect="1"/>
           </p:cNvPicPr>
@@ -11702,8 +11702,8 @@
         </p:blipFill>
         <p:spPr>
           <a:xfrm>
-            <a:off x="6410824" y="2133599"/>
-            <a:ext cx="1109472" cy="350520"/>
+            <a:off x="6412348" y="2133599"/>
+            <a:ext cx="1106424" cy="350520"/>
           </a:xfrm>
           <a:prstGeom prst="rect">
             <a:avLst/>
@@ -11718,7 +11718,7 @@
         </p:nvSpPr>
         <p:spPr>
           <a:xfrm>
-            <a:off x="7520296" y="2080260"/>
+            <a:off x="7518772" y="2080260"/>
             <a:ext cx="1356212" cy="457200"/>
           </a:xfrm>
           <a:prstGeom prst="rect">
@@ -11747,7 +11747,7 @@
       </p:sp>
       <p:pic>
         <p:nvPicPr>
-          <p:cNvPr id="12" name="Picture 11" descr="136c380adf2acf38.png"/>
+          <p:cNvPr id="12" name="Picture 11" descr="8a4ddfeda2c3aab3.png"/>
           <p:cNvPicPr>
             <a:picLocks noChangeAspect="1"/>
           </p:cNvPicPr>
@@ -11761,7 +11761,7 @@
         </p:blipFill>
         <p:spPr>
           <a:xfrm>
-            <a:off x="8739348" y="2132076"/>
+            <a:off x="8737824" y="2132076"/>
             <a:ext cx="1106424" cy="353568"/>
           </a:xfrm>
           <a:prstGeom prst="rect">
@@ -11777,7 +11777,7 @@
         </p:nvSpPr>
         <p:spPr>
           <a:xfrm>
-            <a:off x="9845772" y="2080260"/>
+            <a:off x="9844248" y="2080260"/>
             <a:ext cx="462987" cy="457200"/>
           </a:xfrm>
           <a:prstGeom prst="rect">
@@ -12772,7 +12772,7 @@
         </p:nvSpPr>
         <p:spPr>
           <a:xfrm>
-            <a:off x="1679023" y="2080260"/>
+            <a:off x="1682071" y="2080260"/>
             <a:ext cx="4558064" cy="457200"/>
           </a:xfrm>
           <a:prstGeom prst="rect">
@@ -12801,7 +12801,7 @@
       </p:sp>
       <p:pic>
         <p:nvPicPr>
-          <p:cNvPr id="10" name="Picture 9" descr="9dfa88f60f7695f6.png"/>
+          <p:cNvPr id="10" name="Picture 9" descr="6acdf7e54fb071e3.png"/>
           <p:cNvPicPr>
             <a:picLocks noChangeAspect="1"/>
           </p:cNvPicPr>
@@ -12815,8 +12815,8 @@
         </p:blipFill>
         <p:spPr>
           <a:xfrm>
-            <a:off x="6099928" y="2132076"/>
-            <a:ext cx="1411224" cy="353568"/>
+            <a:off x="6102976" y="2130551"/>
+            <a:ext cx="1408176" cy="356616"/>
           </a:xfrm>
           <a:prstGeom prst="rect">
             <a:avLst/>
@@ -12860,7 +12860,7 @@
       </p:sp>
       <p:pic>
         <p:nvPicPr>
-          <p:cNvPr id="12" name="Picture 11" descr="441501d81b57e020.png"/>
+          <p:cNvPr id="12" name="Picture 11" descr="a8adc052eab579b5.png"/>
           <p:cNvPicPr>
             <a:picLocks noChangeAspect="1"/>
           </p:cNvPicPr>
@@ -12874,8 +12874,8 @@
         </p:blipFill>
         <p:spPr>
           <a:xfrm>
-            <a:off x="8730204" y="2133599"/>
-            <a:ext cx="1426464" cy="350520"/>
+            <a:off x="8730204" y="2132076"/>
+            <a:ext cx="1423416" cy="353568"/>
           </a:xfrm>
           <a:prstGeom prst="rect">
             <a:avLst/>
@@ -12890,7 +12890,7 @@
         </p:nvSpPr>
         <p:spPr>
           <a:xfrm>
-            <a:off x="10156668" y="2080260"/>
+            <a:off x="10153620" y="2080260"/>
             <a:ext cx="462987" cy="457200"/>
           </a:xfrm>
           <a:prstGeom prst="rect">
@@ -15186,7 +15186,7 @@
         </p:nvSpPr>
         <p:spPr>
           <a:xfrm>
-            <a:off x="2894026" y="2080260"/>
+            <a:off x="2892502" y="2080260"/>
             <a:ext cx="5029550" cy="457200"/>
           </a:xfrm>
           <a:prstGeom prst="rect">
@@ -15215,7 +15215,7 @@
       </p:sp>
       <p:pic>
         <p:nvPicPr>
-          <p:cNvPr id="10" name="Picture 9" descr="8eae714437c97eeb.png"/>
+          <p:cNvPr id="10" name="Picture 9" descr="6407d8dfbcc3b670.png"/>
           <p:cNvPicPr>
             <a:picLocks noChangeAspect="1"/>
           </p:cNvPicPr>
@@ -15229,8 +15229,8 @@
         </p:blipFill>
         <p:spPr>
           <a:xfrm>
-            <a:off x="7786417" y="2132076"/>
-            <a:ext cx="1310640" cy="353568"/>
+            <a:off x="7784893" y="2132076"/>
+            <a:ext cx="1313688" cy="353568"/>
           </a:xfrm>
           <a:prstGeom prst="rect">
             <a:avLst/>
@@ -15245,7 +15245,7 @@
         </p:nvSpPr>
         <p:spPr>
           <a:xfrm>
-            <a:off x="9097057" y="2080260"/>
+            <a:off x="9098581" y="2080260"/>
             <a:ext cx="307595" cy="457200"/>
           </a:xfrm>
           <a:prstGeom prst="rect">
@@ -17801,7 +17801,7 @@
       </p:cxnSp>
       <p:pic>
         <p:nvPicPr>
-          <p:cNvPr id="10" name="Picture 9" descr="bb27e8460bd7b46f.png"/>
+          <p:cNvPr id="10" name="Picture 9" descr="ae691909141812d8.png"/>
           <p:cNvPicPr>
             <a:picLocks noChangeAspect="1"/>
           </p:cNvPicPr>
@@ -17860,7 +17860,7 @@
       </p:sp>
       <p:pic>
         <p:nvPicPr>
-          <p:cNvPr id="12" name="Picture 11" descr="5a4cc05f4627caaf.png"/>
+          <p:cNvPr id="12" name="Picture 11" descr="e63b4a648511fa4f.png"/>
           <p:cNvPicPr>
             <a:picLocks noChangeAspect="1"/>
           </p:cNvPicPr>
@@ -17884,7 +17884,7 @@
       </p:pic>
       <p:pic>
         <p:nvPicPr>
-          <p:cNvPr id="13" name="Picture 12" descr="6902e57b0f72241c.png"/>
+          <p:cNvPr id="13" name="Picture 12" descr="91d69a76bf055826.png"/>
           <p:cNvPicPr>
             <a:picLocks noChangeAspect="1"/>
           </p:cNvPicPr>
@@ -17898,8 +17898,8 @@
         </p:blipFill>
         <p:spPr>
           <a:xfrm>
-            <a:off x="2166864" y="3032760"/>
-            <a:ext cx="3139440" cy="399288"/>
+            <a:off x="2166864" y="3031236"/>
+            <a:ext cx="3139440" cy="402336"/>
           </a:xfrm>
           <a:prstGeom prst="rect">
             <a:avLst/>
@@ -17943,7 +17943,7 @@
       </p:sp>
       <p:pic>
         <p:nvPicPr>
-          <p:cNvPr id="15" name="Picture 14" descr="bb8e1a4edb974c66.png"/>
+          <p:cNvPr id="15" name="Picture 14" descr="82060c708b59eedd.png"/>
           <p:cNvPicPr>
             <a:picLocks noChangeAspect="1"/>
           </p:cNvPicPr>
@@ -17957,8 +17957,8 @@
         </p:blipFill>
         <p:spPr>
           <a:xfrm>
-            <a:off x="6352295" y="3037332"/>
-            <a:ext cx="3642360" cy="390144"/>
+            <a:off x="6352295" y="3035808"/>
+            <a:ext cx="3642360" cy="393192"/>
           </a:xfrm>
           <a:prstGeom prst="rect">
             <a:avLst/>
@@ -18353,7 +18353,7 @@
       </p:cxnSp>
       <p:pic>
         <p:nvPicPr>
-          <p:cNvPr id="10" name="Picture 9" descr="31406438abbd7eb7.png"/>
+          <p:cNvPr id="10" name="Picture 9" descr="736142d2660e680c.png"/>
           <p:cNvPicPr>
             <a:picLocks noChangeAspect="1"/>
           </p:cNvPicPr>
@@ -18367,8 +18367,8 @@
         </p:blipFill>
         <p:spPr>
           <a:xfrm>
-            <a:off x="2770368" y="2348484"/>
-            <a:ext cx="2100072" cy="813816"/>
+            <a:off x="2758176" y="2348484"/>
+            <a:ext cx="2112264" cy="810768"/>
           </a:xfrm>
           <a:prstGeom prst="rect">
             <a:avLst/>
@@ -18383,7 +18383,7 @@
         </p:nvSpPr>
         <p:spPr>
           <a:xfrm>
-            <a:off x="4870440" y="2526792"/>
+            <a:off x="4870440" y="2525268"/>
             <a:ext cx="1183151" cy="457200"/>
           </a:xfrm>
           <a:prstGeom prst="rect">
@@ -18412,7 +18412,7 @@
       </p:sp>
       <p:pic>
         <p:nvPicPr>
-          <p:cNvPr id="12" name="Picture 11" descr="8f39ef09a5574063.png"/>
+          <p:cNvPr id="12" name="Picture 11" descr="cfffa4b9d3623afc.png"/>
           <p:cNvPicPr>
             <a:picLocks noChangeAspect="1"/>
           </p:cNvPicPr>
@@ -18427,7 +18427,7 @@
         <p:spPr>
           <a:xfrm>
             <a:off x="5916431" y="2340864"/>
-            <a:ext cx="3474720" cy="829056"/>
+            <a:ext cx="3486912" cy="826008"/>
           </a:xfrm>
           <a:prstGeom prst="rect">
             <a:avLst/>
@@ -18436,7 +18436,7 @@
       </p:pic>
       <p:pic>
         <p:nvPicPr>
-          <p:cNvPr id="13" name="Picture 12" descr="22a7f0f67c296906.png"/>
+          <p:cNvPr id="13" name="Picture 12" descr="7237c8de8558652b.png"/>
           <p:cNvPicPr>
             <a:picLocks noChangeAspect="1"/>
           </p:cNvPicPr>
@@ -18450,8 +18450,8 @@
         </p:blipFill>
         <p:spPr>
           <a:xfrm>
-            <a:off x="4052316" y="3444240"/>
-            <a:ext cx="4056888" cy="829056"/>
+            <a:off x="4047744" y="3441192"/>
+            <a:ext cx="4066031" cy="826008"/>
           </a:xfrm>
           <a:prstGeom prst="rect">
             <a:avLst/>
@@ -18466,7 +18466,7 @@
         </p:nvSpPr>
         <p:spPr>
           <a:xfrm>
-            <a:off x="987552" y="4611624"/>
+            <a:off x="987552" y="4605528"/>
             <a:ext cx="10131551" cy="475488"/>
           </a:xfrm>
           <a:prstGeom prst="rect">
@@ -18501,7 +18501,7 @@
         </p:nvSpPr>
         <p:spPr>
           <a:xfrm>
-            <a:off x="987552" y="5343144"/>
+            <a:off x="987552" y="5337047"/>
             <a:ext cx="10131551" cy="475488"/>
           </a:xfrm>
           <a:prstGeom prst="rect">
@@ -19144,7 +19144,7 @@
       </p:sp>
       <p:pic>
         <p:nvPicPr>
-          <p:cNvPr id="9" name="Picture 8" descr="309181216169ba6e.png"/>
+          <p:cNvPr id="9" name="Picture 8" descr="4fc8bb6e1458afc0.png"/>
           <p:cNvPicPr>
             <a:picLocks noChangeAspect="1"/>
           </p:cNvPicPr>
@@ -19159,7 +19159,7 @@
         <p:spPr>
           <a:xfrm>
             <a:off x="1828800" y="1920240"/>
-            <a:ext cx="4700016" cy="396240"/>
+            <a:ext cx="4700016" cy="399288"/>
           </a:xfrm>
           <a:prstGeom prst="rect">
             <a:avLst/>
@@ -19174,7 +19174,7 @@
         </p:nvSpPr>
         <p:spPr>
           <a:xfrm>
-            <a:off x="6986016" y="1889760"/>
+            <a:off x="6986016" y="1891284"/>
             <a:ext cx="4398264" cy="502920"/>
           </a:xfrm>
           <a:prstGeom prst="rect">
@@ -19203,7 +19203,7 @@
       </p:sp>
       <p:pic>
         <p:nvPicPr>
-          <p:cNvPr id="11" name="Picture 10" descr="111dd5cc8ebad3b5.png"/>
+          <p:cNvPr id="11" name="Picture 10" descr="e6290a823a8494fd.png"/>
           <p:cNvPicPr>
             <a:picLocks noChangeAspect="1"/>
           </p:cNvPicPr>
@@ -19217,8 +19217,8 @@
         </p:blipFill>
         <p:spPr>
           <a:xfrm>
-            <a:off x="1828800" y="2590799"/>
-            <a:ext cx="6541008" cy="332232"/>
+            <a:off x="1828800" y="2593848"/>
+            <a:ext cx="6541008" cy="335280"/>
           </a:xfrm>
           <a:prstGeom prst="rect">
             <a:avLst/>
@@ -19233,7 +19233,7 @@
         </p:nvSpPr>
         <p:spPr>
           <a:xfrm>
-            <a:off x="8827008" y="2528315"/>
+            <a:off x="8827008" y="2532887"/>
             <a:ext cx="2557272" cy="502920"/>
           </a:xfrm>
           <a:prstGeom prst="rect">

--- a/a7/packages/A7 Unit 3 - Exponents and Scientific Notation/Slides/A7 3.08  Slides.pptx
+++ b/a7/packages/A7 Unit 3 - Exponents and Scientific Notation/Slides/A7 3.08  Slides.pptx
@@ -4610,7 +4610,7 @@
       </p:sp>
       <p:pic>
         <p:nvPicPr>
-          <p:cNvPr id="9" name="Picture 8" descr="442927616471d185.png"/>
+          <p:cNvPr id="9" name="Picture 8" descr="ea7fbd33ef479ef5.png"/>
           <p:cNvPicPr>
             <a:picLocks noChangeAspect="1"/>
           </p:cNvPicPr>
@@ -4625,7 +4625,7 @@
         <p:spPr>
           <a:xfrm>
             <a:off x="1828800" y="1920240"/>
-            <a:ext cx="1450848" cy="691896"/>
+            <a:ext cx="1438656" cy="691896"/>
           </a:xfrm>
           <a:prstGeom prst="rect">
             <a:avLst/>
@@ -4640,7 +4640,7 @@
         </p:nvSpPr>
         <p:spPr>
           <a:xfrm>
-            <a:off x="3736848" y="2037588"/>
+            <a:off x="3724656" y="2037588"/>
             <a:ext cx="6400800" cy="502920"/>
           </a:xfrm>
           <a:prstGeom prst="rect">
@@ -4669,7 +4669,7 @@
       </p:sp>
       <p:pic>
         <p:nvPicPr>
-          <p:cNvPr id="11" name="Picture 10" descr="0ffc80c57552c6a0.png"/>
+          <p:cNvPr id="11" name="Picture 10" descr="ecf3b7ddda2003c9.png"/>
           <p:cNvPicPr>
             <a:picLocks noChangeAspect="1"/>
           </p:cNvPicPr>
@@ -4684,7 +4684,7 @@
         <p:spPr>
           <a:xfrm>
             <a:off x="1828800" y="2886456"/>
-            <a:ext cx="2395728" cy="807720"/>
+            <a:ext cx="2386584" cy="807720"/>
           </a:xfrm>
           <a:prstGeom prst="rect">
             <a:avLst/>
@@ -4699,7 +4699,7 @@
         </p:nvSpPr>
         <p:spPr>
           <a:xfrm>
-            <a:off x="4681728" y="3061716"/>
+            <a:off x="4672583" y="3061716"/>
             <a:ext cx="6400800" cy="502920"/>
           </a:xfrm>
           <a:prstGeom prst="rect">
@@ -4728,7 +4728,7 @@
       </p:sp>
       <p:pic>
         <p:nvPicPr>
-          <p:cNvPr id="13" name="Picture 12" descr="c1efb007aba27120.png"/>
+          <p:cNvPr id="13" name="Picture 12" descr="8a1e664f4b411659.png"/>
           <p:cNvPicPr>
             <a:picLocks noChangeAspect="1"/>
           </p:cNvPicPr>
@@ -4743,7 +4743,7 @@
         <p:spPr>
           <a:xfrm>
             <a:off x="1828800" y="3968496"/>
-            <a:ext cx="2026920" cy="292608"/>
+            <a:ext cx="2026920" cy="289560"/>
           </a:xfrm>
           <a:prstGeom prst="rect">
             <a:avLst/>
@@ -4758,7 +4758,7 @@
         </p:nvSpPr>
         <p:spPr>
           <a:xfrm>
-            <a:off x="4312920" y="3886200"/>
+            <a:off x="4312920" y="3884675"/>
             <a:ext cx="6400800" cy="502920"/>
           </a:xfrm>
           <a:prstGeom prst="rect">
@@ -4793,7 +4793,7 @@
         </p:nvSpPr>
         <p:spPr>
           <a:xfrm>
-            <a:off x="777240" y="4718304"/>
+            <a:off x="777240" y="4715256"/>
             <a:ext cx="10607040" cy="548640"/>
           </a:xfrm>
           <a:prstGeom prst="rect">
@@ -5507,7 +5507,7 @@
         </p:nvSpPr>
         <p:spPr>
           <a:xfrm>
-            <a:off x="3304952" y="2185415"/>
+            <a:off x="3304952" y="2186940"/>
             <a:ext cx="3923983" cy="457200"/>
           </a:xfrm>
           <a:prstGeom prst="rect">
@@ -5536,7 +5536,7 @@
       </p:sp>
       <p:pic>
         <p:nvPicPr>
-          <p:cNvPr id="10" name="Picture 9" descr="4a122d0a8ad78980.png"/>
+          <p:cNvPr id="10" name="Picture 9" descr="9213e17c268194f6.png"/>
           <p:cNvPicPr>
             <a:picLocks noChangeAspect="1"/>
           </p:cNvPicPr>
@@ -5551,7 +5551,7 @@
         <p:spPr>
           <a:xfrm>
             <a:off x="7091775" y="2194560"/>
-            <a:ext cx="1764792" cy="438912"/>
+            <a:ext cx="1764792" cy="441960"/>
           </a:xfrm>
           <a:prstGeom prst="rect">
             <a:avLst/>
@@ -5566,7 +5566,7 @@
         </p:nvSpPr>
         <p:spPr>
           <a:xfrm>
-            <a:off x="3624165" y="2945892"/>
+            <a:off x="3624165" y="2948940"/>
             <a:ext cx="3316037" cy="457200"/>
           </a:xfrm>
           <a:prstGeom prst="rect">
@@ -5595,7 +5595,7 @@
       </p:sp>
       <p:pic>
         <p:nvPicPr>
-          <p:cNvPr id="12" name="Picture 11" descr="1751163183b0020d.png"/>
+          <p:cNvPr id="12" name="Picture 11" descr="c0aa154a2b895b46.png"/>
           <p:cNvPicPr>
             <a:picLocks noChangeAspect="1"/>
           </p:cNvPicPr>
@@ -5609,7 +5609,7 @@
         </p:blipFill>
         <p:spPr>
           <a:xfrm>
-            <a:off x="6803042" y="2953512"/>
+            <a:off x="6803042" y="2956560"/>
             <a:ext cx="1734312" cy="441960"/>
           </a:xfrm>
           <a:prstGeom prst="rect">
@@ -5625,7 +5625,7 @@
         </p:nvSpPr>
         <p:spPr>
           <a:xfrm>
-            <a:off x="777240" y="3715512"/>
+            <a:off x="777240" y="3718560"/>
             <a:ext cx="10607040" cy="429370"/>
           </a:xfrm>
           <a:prstGeom prst="rect">
@@ -5660,7 +5660,7 @@
         </p:nvSpPr>
         <p:spPr>
           <a:xfrm>
-            <a:off x="777240" y="4254610"/>
+            <a:off x="777240" y="4257658"/>
             <a:ext cx="10607040" cy="429370"/>
           </a:xfrm>
           <a:prstGeom prst="rect">
@@ -5695,7 +5695,7 @@
         </p:nvSpPr>
         <p:spPr>
           <a:xfrm>
-            <a:off x="777240" y="4976588"/>
+            <a:off x="777240" y="4979636"/>
             <a:ext cx="10607040" cy="548640"/>
           </a:xfrm>
           <a:prstGeom prst="rect">
@@ -7194,7 +7194,7 @@
       </p:sp>
       <p:pic>
         <p:nvPicPr>
-          <p:cNvPr id="10" name="Picture 9" descr="5cf8cb07a78986c2.png"/>
+          <p:cNvPr id="10" name="Picture 9" descr="52d884c0ec37c95a.png"/>
           <p:cNvPicPr>
             <a:picLocks noChangeAspect="1"/>
           </p:cNvPicPr>
@@ -9467,7 +9467,7 @@
       </p:sp>
       <p:pic>
         <p:nvPicPr>
-          <p:cNvPr id="10" name="Picture 9" descr="497497aa864fbaa1.png"/>
+          <p:cNvPr id="10" name="Picture 9" descr="78380355eb5e9104.png"/>
           <p:cNvPicPr>
             <a:picLocks noChangeAspect="1"/>
           </p:cNvPicPr>
@@ -9526,7 +9526,7 @@
       </p:sp>
       <p:pic>
         <p:nvPicPr>
-          <p:cNvPr id="12" name="Picture 11" descr="86019fcf1f04e7bc.png"/>
+          <p:cNvPr id="12" name="Picture 11" descr="7abd88142838d7cb.png"/>
           <p:cNvPicPr>
             <a:picLocks noChangeAspect="1"/>
           </p:cNvPicPr>
@@ -9540,8 +9540,8 @@
         </p:blipFill>
         <p:spPr>
           <a:xfrm>
-            <a:off x="7842356" y="2130551"/>
-            <a:ext cx="1386840" cy="356616"/>
+            <a:off x="7842356" y="2132076"/>
+            <a:ext cx="1386840" cy="353568"/>
           </a:xfrm>
           <a:prstGeom prst="rect">
             <a:avLst/>
@@ -11659,7 +11659,7 @@
         </p:nvSpPr>
         <p:spPr>
           <a:xfrm>
-            <a:off x="1991443" y="2080260"/>
+            <a:off x="1988395" y="2080260"/>
             <a:ext cx="4558064" cy="457200"/>
           </a:xfrm>
           <a:prstGeom prst="rect">
@@ -11688,7 +11688,7 @@
       </p:sp>
       <p:pic>
         <p:nvPicPr>
-          <p:cNvPr id="10" name="Picture 9" descr="f0145cdff15a98d0.png"/>
+          <p:cNvPr id="10" name="Picture 9" descr="f5c1556a2a400797.png"/>
           <p:cNvPicPr>
             <a:picLocks noChangeAspect="1"/>
           </p:cNvPicPr>
@@ -11702,8 +11702,8 @@
         </p:blipFill>
         <p:spPr>
           <a:xfrm>
-            <a:off x="6412348" y="2133599"/>
-            <a:ext cx="1106424" cy="350520"/>
+            <a:off x="6409300" y="2133599"/>
+            <a:ext cx="1109472" cy="350520"/>
           </a:xfrm>
           <a:prstGeom prst="rect">
             <a:avLst/>
@@ -11747,7 +11747,7 @@
       </p:sp>
       <p:pic>
         <p:nvPicPr>
-          <p:cNvPr id="12" name="Picture 11" descr="8a4ddfeda2c3aab3.png"/>
+          <p:cNvPr id="12" name="Picture 11" descr="e6a3bddbc4c7da8d.png"/>
           <p:cNvPicPr>
             <a:picLocks noChangeAspect="1"/>
           </p:cNvPicPr>
@@ -11762,7 +11762,7 @@
         <p:spPr>
           <a:xfrm>
             <a:off x="8737824" y="2132076"/>
-            <a:ext cx="1106424" cy="353568"/>
+            <a:ext cx="1109472" cy="353568"/>
           </a:xfrm>
           <a:prstGeom prst="rect">
             <a:avLst/>
@@ -11777,7 +11777,7 @@
         </p:nvSpPr>
         <p:spPr>
           <a:xfrm>
-            <a:off x="9844248" y="2080260"/>
+            <a:off x="9847296" y="2080260"/>
             <a:ext cx="462987" cy="457200"/>
           </a:xfrm>
           <a:prstGeom prst="rect">
@@ -12801,7 +12801,7 @@
       </p:sp>
       <p:pic>
         <p:nvPicPr>
-          <p:cNvPr id="10" name="Picture 9" descr="6acdf7e54fb071e3.png"/>
+          <p:cNvPr id="10" name="Picture 9" descr="f4de1fd42bbb25b4.png"/>
           <p:cNvPicPr>
             <a:picLocks noChangeAspect="1"/>
           </p:cNvPicPr>
@@ -12815,8 +12815,8 @@
         </p:blipFill>
         <p:spPr>
           <a:xfrm>
-            <a:off x="6102976" y="2130551"/>
-            <a:ext cx="1408176" cy="356616"/>
+            <a:off x="6102976" y="2132076"/>
+            <a:ext cx="1408176" cy="353568"/>
           </a:xfrm>
           <a:prstGeom prst="rect">
             <a:avLst/>
@@ -12860,7 +12860,7 @@
       </p:sp>
       <p:pic>
         <p:nvPicPr>
-          <p:cNvPr id="12" name="Picture 11" descr="a8adc052eab579b5.png"/>
+          <p:cNvPr id="12" name="Picture 11" descr="f8ac844b4918206d.png"/>
           <p:cNvPicPr>
             <a:picLocks noChangeAspect="1"/>
           </p:cNvPicPr>
@@ -15215,7 +15215,7 @@
       </p:sp>
       <p:pic>
         <p:nvPicPr>
-          <p:cNvPr id="10" name="Picture 9" descr="6407d8dfbcc3b670.png"/>
+          <p:cNvPr id="10" name="Picture 9" descr="b1be6639231b1d2d.png"/>
           <p:cNvPicPr>
             <a:picLocks noChangeAspect="1"/>
           </p:cNvPicPr>
@@ -17801,7 +17801,7 @@
       </p:cxnSp>
       <p:pic>
         <p:nvPicPr>
-          <p:cNvPr id="10" name="Picture 9" descr="ae691909141812d8.png"/>
+          <p:cNvPr id="10" name="Picture 9" descr="ca362daa5aca8277.png"/>
           <p:cNvPicPr>
             <a:picLocks noChangeAspect="1"/>
           </p:cNvPicPr>
@@ -17860,7 +17860,7 @@
       </p:sp>
       <p:pic>
         <p:nvPicPr>
-          <p:cNvPr id="12" name="Picture 11" descr="e63b4a648511fa4f.png"/>
+          <p:cNvPr id="12" name="Picture 11" descr="24588923a2e4111e.png"/>
           <p:cNvPicPr>
             <a:picLocks noChangeAspect="1"/>
           </p:cNvPicPr>
@@ -17884,7 +17884,7 @@
       </p:pic>
       <p:pic>
         <p:nvPicPr>
-          <p:cNvPr id="13" name="Picture 12" descr="91d69a76bf055826.png"/>
+          <p:cNvPr id="13" name="Picture 12" descr="8e6cc14ac5e46148.png"/>
           <p:cNvPicPr>
             <a:picLocks noChangeAspect="1"/>
           </p:cNvPicPr>
@@ -17898,8 +17898,8 @@
         </p:blipFill>
         <p:spPr>
           <a:xfrm>
-            <a:off x="2166864" y="3031236"/>
-            <a:ext cx="3139440" cy="402336"/>
+            <a:off x="2168388" y="3031236"/>
+            <a:ext cx="3136392" cy="402336"/>
           </a:xfrm>
           <a:prstGeom prst="rect">
             <a:avLst/>
@@ -17914,7 +17914,7 @@
         </p:nvSpPr>
         <p:spPr>
           <a:xfrm>
-            <a:off x="5306304" y="3003804"/>
+            <a:off x="5304780" y="3003804"/>
             <a:ext cx="1183151" cy="457200"/>
           </a:xfrm>
           <a:prstGeom prst="rect">
@@ -17943,7 +17943,7 @@
       </p:sp>
       <p:pic>
         <p:nvPicPr>
-          <p:cNvPr id="15" name="Picture 14" descr="82060c708b59eedd.png"/>
+          <p:cNvPr id="15" name="Picture 14" descr="067fcc93f2b9d5f4.png"/>
           <p:cNvPicPr>
             <a:picLocks noChangeAspect="1"/>
           </p:cNvPicPr>
@@ -17957,8 +17957,8 @@
         </p:blipFill>
         <p:spPr>
           <a:xfrm>
-            <a:off x="6352295" y="3035808"/>
-            <a:ext cx="3642360" cy="393192"/>
+            <a:off x="6350771" y="3037332"/>
+            <a:ext cx="3642360" cy="390144"/>
           </a:xfrm>
           <a:prstGeom prst="rect">
             <a:avLst/>
@@ -18353,7 +18353,7 @@
       </p:cxnSp>
       <p:pic>
         <p:nvPicPr>
-          <p:cNvPr id="10" name="Picture 9" descr="736142d2660e680c.png"/>
+          <p:cNvPr id="10" name="Picture 9" descr="18462689543fb1e1.png"/>
           <p:cNvPicPr>
             <a:picLocks noChangeAspect="1"/>
           </p:cNvPicPr>
@@ -18367,8 +18367,8 @@
         </p:blipFill>
         <p:spPr>
           <a:xfrm>
-            <a:off x="2758176" y="2348484"/>
-            <a:ext cx="2112264" cy="810768"/>
+            <a:off x="2767320" y="2348484"/>
+            <a:ext cx="2103120" cy="810768"/>
           </a:xfrm>
           <a:prstGeom prst="rect">
             <a:avLst/>
@@ -18412,7 +18412,7 @@
       </p:sp>
       <p:pic>
         <p:nvPicPr>
-          <p:cNvPr id="12" name="Picture 11" descr="cfffa4b9d3623afc.png"/>
+          <p:cNvPr id="12" name="Picture 11" descr="23b76398c3e7acdd.png"/>
           <p:cNvPicPr>
             <a:picLocks noChangeAspect="1"/>
           </p:cNvPicPr>
@@ -18427,7 +18427,7 @@
         <p:spPr>
           <a:xfrm>
             <a:off x="5916431" y="2340864"/>
-            <a:ext cx="3486912" cy="826008"/>
+            <a:ext cx="3477768" cy="826008"/>
           </a:xfrm>
           <a:prstGeom prst="rect">
             <a:avLst/>
@@ -18436,7 +18436,7 @@
       </p:pic>
       <p:pic>
         <p:nvPicPr>
-          <p:cNvPr id="13" name="Picture 12" descr="7237c8de8558652b.png"/>
+          <p:cNvPr id="13" name="Picture 12" descr="a006e1f5dbf8305d.png"/>
           <p:cNvPicPr>
             <a:picLocks noChangeAspect="1"/>
           </p:cNvPicPr>
@@ -18450,8 +18450,8 @@
         </p:blipFill>
         <p:spPr>
           <a:xfrm>
-            <a:off x="4047744" y="3441192"/>
-            <a:ext cx="4066031" cy="826008"/>
+            <a:off x="4052316" y="3441192"/>
+            <a:ext cx="4056888" cy="826008"/>
           </a:xfrm>
           <a:prstGeom prst="rect">
             <a:avLst/>
@@ -19144,7 +19144,7 @@
       </p:sp>
       <p:pic>
         <p:nvPicPr>
-          <p:cNvPr id="9" name="Picture 8" descr="4fc8bb6e1458afc0.png"/>
+          <p:cNvPr id="9" name="Picture 8" descr="c33cd55185211120.png"/>
           <p:cNvPicPr>
             <a:picLocks noChangeAspect="1"/>
           </p:cNvPicPr>
@@ -19159,7 +19159,7 @@
         <p:spPr>
           <a:xfrm>
             <a:off x="1828800" y="1920240"/>
-            <a:ext cx="4700016" cy="399288"/>
+            <a:ext cx="4703064" cy="399288"/>
           </a:xfrm>
           <a:prstGeom prst="rect">
             <a:avLst/>
@@ -19174,8 +19174,8 @@
         </p:nvSpPr>
         <p:spPr>
           <a:xfrm>
-            <a:off x="6986016" y="1891284"/>
-            <a:ext cx="4398264" cy="502920"/>
+            <a:off x="6989064" y="1891284"/>
+            <a:ext cx="4395215" cy="502920"/>
           </a:xfrm>
           <a:prstGeom prst="rect">
             <a:avLst/>
@@ -19203,7 +19203,7 @@
       </p:sp>
       <p:pic>
         <p:nvPicPr>
-          <p:cNvPr id="11" name="Picture 10" descr="e6290a823a8494fd.png"/>
+          <p:cNvPr id="11" name="Picture 10" descr="826a198efbf96eef.png"/>
           <p:cNvPicPr>
             <a:picLocks noChangeAspect="1"/>
           </p:cNvPicPr>
@@ -19218,7 +19218,7 @@
         <p:spPr>
           <a:xfrm>
             <a:off x="1828800" y="2593848"/>
-            <a:ext cx="6541008" cy="335280"/>
+            <a:ext cx="6544056" cy="335280"/>
           </a:xfrm>
           <a:prstGeom prst="rect">
             <a:avLst/>
@@ -19233,8 +19233,8 @@
         </p:nvSpPr>
         <p:spPr>
           <a:xfrm>
-            <a:off x="8827008" y="2532887"/>
-            <a:ext cx="2557272" cy="502920"/>
+            <a:off x="8830056" y="2532887"/>
+            <a:ext cx="2554223" cy="502920"/>
           </a:xfrm>
           <a:prstGeom prst="rect">
             <a:avLst/>

--- a/a7/packages/A7 Unit 3 - Exponents and Scientific Notation/Slides/A7 3.08  Slides.pptx
+++ b/a7/packages/A7 Unit 3 - Exponents and Scientific Notation/Slides/A7 3.08  Slides.pptx
@@ -10008,7 +10008,7 @@
                 </a:solidFill>
                 <a:latin typeface="Century Schoolbook"/>
               </a:rPr>
-              <a:t>7</a:t>
+              <a:t>8</a:t>
             </a:r>
           </a:p>
         </p:txBody>
@@ -10052,7 +10052,7 @@
                 </a:solidFill>
                 <a:latin typeface="Century Schoolbook"/>
               </a:rPr>
-              <a:t>52 × 10</a:t>
+              <a:t>5.2 × 10</a:t>
             </a:r>
             <a:r>
               <a:rPr sz="2400" b="0" i="0" baseline="30000">
@@ -10061,7 +10061,7 @@
                 </a:solidFill>
                 <a:latin typeface="Century Schoolbook"/>
               </a:rPr>
-              <a:t>6</a:t>
+              <a:t>7</a:t>
             </a:r>
           </a:p>
         </p:txBody>
@@ -10105,7 +10105,7 @@
                 </a:solidFill>
                 <a:latin typeface="Century Schoolbook"/>
               </a:rPr>
-              <a:t>5.2 × 10</a:t>
+              <a:t>52 × 10</a:t>
             </a:r>
             <a:r>
               <a:rPr sz="2400" b="0" i="0" baseline="30000">
@@ -10167,7 +10167,7 @@
                 </a:solidFill>
                 <a:latin typeface="Century Schoolbook"/>
               </a:rPr>
-              <a:t>8</a:t>
+              <a:t>6</a:t>
             </a:r>
           </a:p>
         </p:txBody>
@@ -10531,29 +10531,29 @@
             <a:r>
               <a:rPr sz="2400" b="1" i="0">
                 <a:solidFill>
-                  <a:srgbClr val="9E1B32"/>
+                  <a:srgbClr val="1A1A1A"/>
                 </a:solidFill>
                 <a:latin typeface="Century Schoolbook"/>
               </a:rPr>
               <a:t>A.   </a:t>
             </a:r>
             <a:r>
-              <a:rPr sz="2400" b="1" i="0">
-                <a:solidFill>
-                  <a:srgbClr val="9E1B32"/>
+              <a:rPr sz="2400" b="0" i="0">
+                <a:solidFill>
+                  <a:srgbClr val="1A1A1A"/>
                 </a:solidFill>
                 <a:latin typeface="Century Schoolbook"/>
               </a:rPr>
               <a:t>5.2 × 10</a:t>
             </a:r>
             <a:r>
-              <a:rPr sz="2400" b="1" i="0" baseline="30000">
-                <a:solidFill>
-                  <a:srgbClr val="9E1B32"/>
-                </a:solidFill>
-                <a:latin typeface="Century Schoolbook"/>
-              </a:rPr>
-              <a:t>7</a:t>
+              <a:rPr sz="2400" b="0" i="0" baseline="30000">
+                <a:solidFill>
+                  <a:srgbClr val="1A1A1A"/>
+                </a:solidFill>
+                <a:latin typeface="Century Schoolbook"/>
+              </a:rPr>
+              <a:t>8</a:t>
             </a:r>
           </a:p>
         </p:txBody>
@@ -10584,29 +10584,29 @@
             <a:r>
               <a:rPr sz="2400" b="1" i="0">
                 <a:solidFill>
-                  <a:srgbClr val="1A1A1A"/>
+                  <a:srgbClr val="9E1B32"/>
                 </a:solidFill>
                 <a:latin typeface="Century Schoolbook"/>
               </a:rPr>
               <a:t>B.   </a:t>
             </a:r>
             <a:r>
-              <a:rPr sz="2400" b="0" i="0">
-                <a:solidFill>
-                  <a:srgbClr val="1A1A1A"/>
-                </a:solidFill>
-                <a:latin typeface="Century Schoolbook"/>
-              </a:rPr>
-              <a:t>52 × 10</a:t>
-            </a:r>
-            <a:r>
-              <a:rPr sz="2400" b="0" i="0" baseline="30000">
-                <a:solidFill>
-                  <a:srgbClr val="1A1A1A"/>
-                </a:solidFill>
-                <a:latin typeface="Century Schoolbook"/>
-              </a:rPr>
-              <a:t>6</a:t>
+              <a:rPr sz="2400" b="1" i="0">
+                <a:solidFill>
+                  <a:srgbClr val="9E1B32"/>
+                </a:solidFill>
+                <a:latin typeface="Century Schoolbook"/>
+              </a:rPr>
+              <a:t>5.2 × 10</a:t>
+            </a:r>
+            <a:r>
+              <a:rPr sz="2400" b="1" i="0" baseline="30000">
+                <a:solidFill>
+                  <a:srgbClr val="9E1B32"/>
+                </a:solidFill>
+                <a:latin typeface="Century Schoolbook"/>
+              </a:rPr>
+              <a:t>7</a:t>
             </a:r>
           </a:p>
         </p:txBody>
@@ -10650,7 +10650,7 @@
                 </a:solidFill>
                 <a:latin typeface="Century Schoolbook"/>
               </a:rPr>
-              <a:t>5.2 × 10</a:t>
+              <a:t>52 × 10</a:t>
             </a:r>
             <a:r>
               <a:rPr sz="2400" b="0" i="0" baseline="30000">
@@ -10712,7 +10712,7 @@
                 </a:solidFill>
                 <a:latin typeface="Century Schoolbook"/>
               </a:rPr>
-              <a:t>8</a:t>
+              <a:t>6</a:t>
             </a:r>
           </a:p>
         </p:txBody>
@@ -10747,7 +10747,7 @@
                 </a:solidFill>
                 <a:latin typeface="Century Schoolbook"/>
               </a:rPr>
-              <a:t>Answer:   A — 5.2 × 10</a:t>
+              <a:t>Answer:   B — 5.2 × 10</a:t>
             </a:r>
             <a:r>
               <a:rPr sz="3200" b="1" i="0" baseline="30000">
@@ -11216,7 +11216,7 @@
                 </a:solidFill>
                 <a:latin typeface="Century Schoolbook"/>
               </a:rPr>
-              <a:t>1,000</a:t>
+              <a:t>1.6</a:t>
             </a:r>
           </a:p>
         </p:txBody>
@@ -11304,7 +11304,7 @@
                 </a:solidFill>
                 <a:latin typeface="Century Schoolbook"/>
               </a:rPr>
-              <a:t>300</a:t>
+              <a:t>1,000</a:t>
             </a:r>
           </a:p>
         </p:txBody>
@@ -11348,7 +11348,7 @@
                 </a:solidFill>
                 <a:latin typeface="Century Schoolbook"/>
               </a:rPr>
-              <a:t>1.6</a:t>
+              <a:t>300</a:t>
             </a:r>
           </a:p>
         </p:txBody>
@@ -11830,20 +11830,20 @@
             <a:r>
               <a:rPr sz="2400" b="1" i="0">
                 <a:solidFill>
-                  <a:srgbClr val="9E1B32"/>
+                  <a:srgbClr val="1A1A1A"/>
                 </a:solidFill>
                 <a:latin typeface="Century Schoolbook"/>
               </a:rPr>
               <a:t>A.   </a:t>
             </a:r>
             <a:r>
-              <a:rPr sz="2400" b="1" i="0">
-                <a:solidFill>
-                  <a:srgbClr val="9E1B32"/>
-                </a:solidFill>
-                <a:latin typeface="Century Schoolbook"/>
-              </a:rPr>
-              <a:t>1,000</a:t>
+              <a:rPr sz="2400" b="0" i="0">
+                <a:solidFill>
+                  <a:srgbClr val="1A1A1A"/>
+                </a:solidFill>
+                <a:latin typeface="Century Schoolbook"/>
+              </a:rPr>
+              <a:t>1.6</a:t>
             </a:r>
           </a:p>
         </p:txBody>
@@ -11918,20 +11918,20 @@
             <a:r>
               <a:rPr sz="2400" b="1" i="0">
                 <a:solidFill>
-                  <a:srgbClr val="1A1A1A"/>
+                  <a:srgbClr val="9E1B32"/>
                 </a:solidFill>
                 <a:latin typeface="Century Schoolbook"/>
               </a:rPr>
               <a:t>C.   </a:t>
             </a:r>
             <a:r>
-              <a:rPr sz="2400" b="0" i="0">
-                <a:solidFill>
-                  <a:srgbClr val="1A1A1A"/>
-                </a:solidFill>
-                <a:latin typeface="Century Schoolbook"/>
-              </a:rPr>
-              <a:t>300</a:t>
+              <a:rPr sz="2400" b="1" i="0">
+                <a:solidFill>
+                  <a:srgbClr val="9E1B32"/>
+                </a:solidFill>
+                <a:latin typeface="Century Schoolbook"/>
+              </a:rPr>
+              <a:t>1,000</a:t>
             </a:r>
           </a:p>
         </p:txBody>
@@ -11975,7 +11975,7 @@
                 </a:solidFill>
                 <a:latin typeface="Century Schoolbook"/>
               </a:rPr>
-              <a:t>1.6</a:t>
+              <a:t>300</a:t>
             </a:r>
           </a:p>
         </p:txBody>
@@ -12010,7 +12010,7 @@
                 </a:solidFill>
                 <a:latin typeface="Century Schoolbook"/>
               </a:rPr>
-              <a:t>Answer:   A — 1,000</a:t>
+              <a:t>Answer:   C — 1,000</a:t>
             </a:r>
           </a:p>
         </p:txBody>

--- a/a7/packages/A7 Unit 3 - Exponents and Scientific Notation/Slides/A7 3.08  Slides.pptx
+++ b/a7/packages/A7 Unit 3 - Exponents and Scientific Notation/Slides/A7 3.08  Slides.pptx
@@ -7592,23 +7592,23 @@
         </p:nvSpPr>
         <p:spPr>
           <a:xfrm>
-            <a:off x="777240" y="2194560"/>
-            <a:ext cx="10607040" cy="465151"/>
-          </a:xfrm>
-          <a:prstGeom prst="rect">
-            <a:avLst/>
-          </a:prstGeom>
-          <a:noFill/>
-        </p:spPr>
-        <p:txBody>
-          <a:bodyPr wrap="square" lIns="45720" rIns="45720" tIns="18288" bIns="18288" anchor="t">
-            <a:spAutoFit/>
-          </a:bodyPr>
-          <a:lstStyle/>
-          <a:p>
-            <a:pPr algn="ctr"/>
-            <a:r>
-              <a:rPr sz="2600" b="0" i="0">
+            <a:off x="1234440" y="1874519"/>
+            <a:ext cx="10058400" cy="429370"/>
+          </a:xfrm>
+          <a:prstGeom prst="rect">
+            <a:avLst/>
+          </a:prstGeom>
+          <a:noFill/>
+        </p:spPr>
+        <p:txBody>
+          <a:bodyPr wrap="square" lIns="45720" rIns="45720" tIns="18288" bIns="18288" anchor="t">
+            <a:spAutoFit/>
+          </a:bodyPr>
+          <a:lstStyle/>
+          <a:p>
+            <a:pPr algn="l"/>
+            <a:r>
+              <a:rPr sz="2400" b="0" i="0">
                 <a:solidFill>
                   <a:srgbClr val="1A1A1A"/>
                 </a:solidFill>
@@ -7627,23 +7627,23 @@
         </p:nvSpPr>
         <p:spPr>
           <a:xfrm>
-            <a:off x="777240" y="2769439"/>
-            <a:ext cx="10607040" cy="465151"/>
-          </a:xfrm>
-          <a:prstGeom prst="rect">
-            <a:avLst/>
-          </a:prstGeom>
-          <a:noFill/>
-        </p:spPr>
-        <p:txBody>
-          <a:bodyPr wrap="square" lIns="45720" rIns="45720" tIns="18288" bIns="18288" anchor="t">
-            <a:spAutoFit/>
-          </a:bodyPr>
-          <a:lstStyle/>
-          <a:p>
-            <a:pPr algn="ctr"/>
-            <a:r>
-              <a:rPr sz="2600" b="0" i="0">
+            <a:off x="1234440" y="2413618"/>
+            <a:ext cx="10058400" cy="429370"/>
+          </a:xfrm>
+          <a:prstGeom prst="rect">
+            <a:avLst/>
+          </a:prstGeom>
+          <a:noFill/>
+        </p:spPr>
+        <p:txBody>
+          <a:bodyPr wrap="square" lIns="45720" rIns="45720" tIns="18288" bIns="18288" anchor="t">
+            <a:spAutoFit/>
+          </a:bodyPr>
+          <a:lstStyle/>
+          <a:p>
+            <a:pPr algn="l"/>
+            <a:r>
+              <a:rPr sz="2400" b="0" i="0">
                 <a:solidFill>
                   <a:srgbClr val="1A1A1A"/>
                 </a:solidFill>
@@ -7662,23 +7662,23 @@
         </p:nvSpPr>
         <p:spPr>
           <a:xfrm>
-            <a:off x="777240" y="3344318"/>
-            <a:ext cx="10607040" cy="465151"/>
-          </a:xfrm>
-          <a:prstGeom prst="rect">
-            <a:avLst/>
-          </a:prstGeom>
-          <a:noFill/>
-        </p:spPr>
-        <p:txBody>
-          <a:bodyPr wrap="square" lIns="45720" rIns="45720" tIns="18288" bIns="18288" anchor="t">
-            <a:spAutoFit/>
-          </a:bodyPr>
-          <a:lstStyle/>
-          <a:p>
-            <a:pPr algn="ctr"/>
-            <a:r>
-              <a:rPr sz="2600" b="0" i="0">
+            <a:off x="1234440" y="2952716"/>
+            <a:ext cx="10058400" cy="429370"/>
+          </a:xfrm>
+          <a:prstGeom prst="rect">
+            <a:avLst/>
+          </a:prstGeom>
+          <a:noFill/>
+        </p:spPr>
+        <p:txBody>
+          <a:bodyPr wrap="square" lIns="45720" rIns="45720" tIns="18288" bIns="18288" anchor="t">
+            <a:spAutoFit/>
+          </a:bodyPr>
+          <a:lstStyle/>
+          <a:p>
+            <a:pPr algn="l"/>
+            <a:r>
+              <a:rPr sz="2400" b="1" i="0">
                 <a:solidFill>
                   <a:srgbClr val="1A1A1A"/>
                 </a:solidFill>
@@ -7720,41 +7720,6 @@
                 <a:latin typeface="Century Schoolbook"/>
               </a:rPr>
               <a:t>Answer it.</a:t>
-            </a:r>
-          </a:p>
-        </p:txBody>
-      </p:sp>
-      <p:sp>
-        <p:nvSpPr>
-          <p:cNvPr id="13" name="TextBox 12"/>
-          <p:cNvSpPr txBox="1"/>
-          <p:nvPr/>
-        </p:nvSpPr>
-        <p:spPr>
-          <a:xfrm>
-            <a:off x="777240" y="4828032"/>
-            <a:ext cx="10607040" cy="365760"/>
-          </a:xfrm>
-          <a:prstGeom prst="rect">
-            <a:avLst/>
-          </a:prstGeom>
-          <a:noFill/>
-        </p:spPr>
-        <p:txBody>
-          <a:bodyPr wrap="square" lIns="45720" rIns="45720" tIns="18288" bIns="18288" anchor="t">
-            <a:spAutoFit/>
-          </a:bodyPr>
-          <a:lstStyle/>
-          <a:p>
-            <a:pPr algn="ctr"/>
-            <a:r>
-              <a:rPr sz="1900" b="0" i="1">
-                <a:solidFill>
-                  <a:srgbClr val="6B6B6B"/>
-                </a:solidFill>
-                <a:latin typeface="Century Schoolbook"/>
-              </a:rPr>
-              <a:t>Every nonzero digit stays in the coefficient.</a:t>
             </a:r>
           </a:p>
         </p:txBody>
@@ -8505,23 +8470,23 @@
         </p:nvSpPr>
         <p:spPr>
           <a:xfrm>
-            <a:off x="777240" y="2103120"/>
-            <a:ext cx="10607040" cy="465151"/>
-          </a:xfrm>
-          <a:prstGeom prst="rect">
-            <a:avLst/>
-          </a:prstGeom>
-          <a:noFill/>
-        </p:spPr>
-        <p:txBody>
-          <a:bodyPr wrap="square" lIns="45720" rIns="45720" tIns="18288" bIns="18288" anchor="t">
-            <a:spAutoFit/>
-          </a:bodyPr>
-          <a:lstStyle/>
-          <a:p>
-            <a:pPr algn="ctr"/>
-            <a:r>
-              <a:rPr sz="2600" b="0" i="0">
+            <a:off x="1234440" y="1874519"/>
+            <a:ext cx="10058400" cy="429370"/>
+          </a:xfrm>
+          <a:prstGeom prst="rect">
+            <a:avLst/>
+          </a:prstGeom>
+          <a:noFill/>
+        </p:spPr>
+        <p:txBody>
+          <a:bodyPr wrap="square" lIns="45720" rIns="45720" tIns="18288" bIns="18288" anchor="t">
+            <a:spAutoFit/>
+          </a:bodyPr>
+          <a:lstStyle/>
+          <a:p>
+            <a:pPr algn="l"/>
+            <a:r>
+              <a:rPr sz="2400" b="0" i="0">
                 <a:solidFill>
                   <a:srgbClr val="1A1A1A"/>
                 </a:solidFill>
@@ -8540,23 +8505,23 @@
         </p:nvSpPr>
         <p:spPr>
           <a:xfrm>
-            <a:off x="777240" y="2677999"/>
-            <a:ext cx="10607040" cy="465151"/>
-          </a:xfrm>
-          <a:prstGeom prst="rect">
-            <a:avLst/>
-          </a:prstGeom>
-          <a:noFill/>
-        </p:spPr>
-        <p:txBody>
-          <a:bodyPr wrap="square" lIns="45720" rIns="45720" tIns="18288" bIns="18288" anchor="t">
-            <a:spAutoFit/>
-          </a:bodyPr>
-          <a:lstStyle/>
-          <a:p>
-            <a:pPr algn="ctr"/>
-            <a:r>
-              <a:rPr sz="2600" b="0" i="0">
+            <a:off x="1234440" y="2413618"/>
+            <a:ext cx="10058400" cy="429370"/>
+          </a:xfrm>
+          <a:prstGeom prst="rect">
+            <a:avLst/>
+          </a:prstGeom>
+          <a:noFill/>
+        </p:spPr>
+        <p:txBody>
+          <a:bodyPr wrap="square" lIns="45720" rIns="45720" tIns="18288" bIns="18288" anchor="t">
+            <a:spAutoFit/>
+          </a:bodyPr>
+          <a:lstStyle/>
+          <a:p>
+            <a:pPr algn="l"/>
+            <a:r>
+              <a:rPr sz="2400" b="0" i="0">
                 <a:solidFill>
                   <a:srgbClr val="1A1A1A"/>
                 </a:solidFill>
@@ -8575,23 +8540,23 @@
         </p:nvSpPr>
         <p:spPr>
           <a:xfrm>
-            <a:off x="777240" y="3252878"/>
-            <a:ext cx="10607040" cy="465151"/>
-          </a:xfrm>
-          <a:prstGeom prst="rect">
-            <a:avLst/>
-          </a:prstGeom>
-          <a:noFill/>
-        </p:spPr>
-        <p:txBody>
-          <a:bodyPr wrap="square" lIns="45720" rIns="45720" tIns="18288" bIns="18288" anchor="t">
-            <a:spAutoFit/>
-          </a:bodyPr>
-          <a:lstStyle/>
-          <a:p>
-            <a:pPr algn="ctr"/>
-            <a:r>
-              <a:rPr sz="2600" b="0" i="0">
+            <a:off x="1234440" y="2952716"/>
+            <a:ext cx="10058400" cy="429370"/>
+          </a:xfrm>
+          <a:prstGeom prst="rect">
+            <a:avLst/>
+          </a:prstGeom>
+          <a:noFill/>
+        </p:spPr>
+        <p:txBody>
+          <a:bodyPr wrap="square" lIns="45720" rIns="45720" tIns="18288" bIns="18288" anchor="t">
+            <a:spAutoFit/>
+          </a:bodyPr>
+          <a:lstStyle/>
+          <a:p>
+            <a:pPr algn="l"/>
+            <a:r>
+              <a:rPr sz="2400" b="1" i="0">
                 <a:solidFill>
                   <a:srgbClr val="1A1A1A"/>
                 </a:solidFill>
@@ -8610,7 +8575,7 @@
         </p:nvSpPr>
         <p:spPr>
           <a:xfrm>
-            <a:off x="1828800" y="3873477"/>
+            <a:off x="1828800" y="3583255"/>
             <a:ext cx="8503920" cy="548640"/>
           </a:xfrm>
           <a:prstGeom prst="rect">
@@ -14819,7 +14784,7 @@
         <p:spPr>
           <a:xfrm>
             <a:off x="777240" y="2880360"/>
-            <a:ext cx="10607040" cy="822960"/>
+            <a:ext cx="10607040" cy="411480"/>
           </a:xfrm>
           <a:prstGeom prst="rect">
             <a:avLst/>
@@ -15281,7 +15246,7 @@
         <p:spPr>
           <a:xfrm>
             <a:off x="777240" y="2788920"/>
-            <a:ext cx="10607040" cy="822960"/>
+            <a:ext cx="10607040" cy="411480"/>
           </a:xfrm>
           <a:prstGeom prst="rect">
             <a:avLst/>
@@ -15315,7 +15280,7 @@
         </p:nvSpPr>
         <p:spPr>
           <a:xfrm>
-            <a:off x="1828800" y="3767328"/>
+            <a:off x="1828800" y="3355848"/>
             <a:ext cx="8503920" cy="548640"/>
           </a:xfrm>
           <a:prstGeom prst="rect">

--- a/a7/packages/A7 Unit 3 - Exponents and Scientific Notation/Slides/A7 3.08  Slides.pptx
+++ b/a7/packages/A7 Unit 3 - Exponents and Scientific Notation/Slides/A7 3.08  Slides.pptx
@@ -15316,7 +15316,7 @@
         <p:spPr>
           <a:xfrm>
             <a:off x="777240" y="4663440"/>
-            <a:ext cx="10607040" cy="548640"/>
+            <a:ext cx="10607040" cy="1072896"/>
           </a:xfrm>
           <a:prstGeom prst="rect">
             <a:avLst/>
